--- a/it/slides/06-Architettura_dei_Calcolatori-Rappresentazione_dei_Numeri_Reali.pptx
+++ b/it/slides/06-Architettura_dei_Calcolatori-Rappresentazione_dei_Numeri_Reali.pptx
@@ -126,13 +126,13 @@
   <p:extLst>
     <p:ext uri="{521415D9-36F7-43E2-AB2F-B90AF26B5E84}">
       <p14:sectionLst xmlns:p14="http://schemas.microsoft.com/office/powerpoint/2010/main">
-        <p14:section name="Apertura" id="{081dd573-5265-523c-fe81-41cbe5848e9f}">
+        <p14:section name="Apertura" id="{0ca0ccab-ae8f-393d-f5b1-f62a80568825}">
           <p14:sldIdLst>
             <p14:sldId id="256"/>
             <p14:sldId id="257"/>
           </p14:sldIdLst>
         </p14:section>
-        <p14:section name="Altre codifiche per gli interi con segno" id="{782840cf-872d-6040-d266-74e3404572b8}">
+        <p14:section name="Altre codifiche per gli interi con segno" id="{df39a300-cba6-22ef-c2c9-4dfb8c119f72}">
           <p14:sldIdLst>
             <p14:sldId id="258"/>
             <p14:sldId id="259"/>
@@ -140,13 +140,13 @@
             <p14:sldId id="261"/>
           </p14:sldIdLst>
         </p14:section>
-        <p14:section name="Virgola fissa" id="{3b6b3cc6-e0f7-8665-60c2-e30a650d782a}">
+        <p14:section name="Virgola fissa" id="{34cbc123-6a27-a764-380a-4195b009a58a}">
           <p14:sldIdLst>
             <p14:sldId id="262"/>
             <p14:sldId id="263"/>
           </p14:sldIdLst>
         </p14:section>
-        <p14:section name="Virgola mobile" id="{c7ddcec2-adf3-c253-5b11-7384041f9727}">
+        <p14:section name="Virgola mobile" id="{3738cd0e-c699-a14b-a48f-000dafd68f2d}">
           <p14:sldIdLst>
             <p14:sldId id="264"/>
             <p14:sldId id="265"/>
@@ -156,7 +156,7 @@
             <p14:sldId id="269"/>
           </p14:sldIdLst>
         </p14:section>
-        <p14:section name="Ritorno alla macchina" id="{4c964a71-c425-f1de-b4bb-656b81ce1fd2}">
+        <p14:section name="Ritorno alla macchina" id="{bf28a8a1-6242-70b7-2190-2e1cd800a70e}">
           <p14:sldIdLst>
             <p14:sldId id="270"/>
             <p14:sldId id="271"/>
@@ -3294,7 +3294,63 @@
       </p:sp>
       <p:sp>
         <p:nvSpPr>
-          <p:cNvPr id="12" name="Shape 10"/>
+          <p:cNvPr id="12" name="Text 10"/>
+          <p:cNvSpPr txBox="1"/>
+          <p:nvPr/>
+        </p:nvSpPr>
+        <p:spPr>
+          <a:xfrm>
+            <a:off x="4693615" y="566928"/>
+            <a:ext cx="6949440" cy="640080"/>
+          </a:xfrm>
+          <a:prstGeom prst="rect">
+            <a:avLst/>
+          </a:prstGeom>
+          <a:noFill/>
+          <a:ln/>
+        </p:spPr>
+        <p:txBody>
+          <a:bodyPr wrap="square" lIns="0" tIns="0" rIns="0" bIns="0" rtlCol="0" anchor="t"/>
+          <a:lstStyle/>
+          <a:p>
+            <a:pPr algn="r" indent="0" marL="0">
+              <a:buNone/>
+            </a:pPr>
+            <a:r>
+              <a:rPr lang="en-US" sz="1300" dirty="0">
+                <a:solidFill>
+                  <a:srgbClr val="CFE3EA"/>
+                </a:solidFill>
+                <a:latin typeface="Calibri" pitchFamily="34" charset="0"/>
+                <a:ea typeface="Calibri" pitchFamily="34" charset="-122"/>
+                <a:cs typeface="Calibri" pitchFamily="34" charset="-120"/>
+              </a:rPr>
+              <a:t>Presentazione della lezione. I listati, il programma completo e come provarlo sono nella presentazione del codice:</a:t>
+            </a:r>
+            <a:endParaRPr lang="en-US" sz="1300" dirty="0"/>
+          </a:p>
+          <a:p>
+            <a:pPr algn="r" indent="0" marL="0">
+              <a:buNone/>
+            </a:pPr>
+            <a:r>
+              <a:rPr lang="en-US" sz="1300" dirty="0">
+                <a:solidFill>
+                  <a:srgbClr val="CFE3EA"/>
+                </a:solidFill>
+                <a:latin typeface="Calibri" pitchFamily="34" charset="0"/>
+                <a:ea typeface="Calibri" pitchFamily="34" charset="-122"/>
+                <a:cs typeface="Calibri" pitchFamily="34" charset="-120"/>
+              </a:rPr>
+              <a:t>06-Architettura_dei_Calcolatori-Rappresentazione_dei_Numeri_Reali-Codice.pptx</a:t>
+            </a:r>
+            <a:endParaRPr lang="en-US" sz="1300" dirty="0"/>
+          </a:p>
+        </p:txBody>
+      </p:sp>
+      <p:sp>
+        <p:nvSpPr>
+          <p:cNvPr id="13" name="Shape 11"/>
           <p:cNvSpPr/>
           <p:nvPr/>
         </p:nvSpPr>
@@ -3321,7 +3377,7 @@
       </p:sp>
       <p:pic>
         <p:nvPicPr>
-          <p:cNvPr id="13" name="Image 0" descr="/Users/raffaelemontella/devel/riscv-prg32/computer-architecture-with-prg32/tools/assets/game_raycaster.png">    </p:cNvPr>
+          <p:cNvPr id="14" name="Image 0" descr="/Users/raffaelemontella/devel/riscv-prg32/computer-architecture-with-prg32/tools/assets/game_raycaster.png">    </p:cNvPr>
           <p:cNvPicPr>
             <a:picLocks noChangeAspect="1"/>
           </p:cNvPicPr>

--- a/it/slides/06-Architettura_dei_Calcolatori-Rappresentazione_dei_Numeri_Reali.pptx
+++ b/it/slides/06-Architettura_dei_Calcolatori-Rappresentazione_dei_Numeri_Reali.pptx
@@ -126,13 +126,13 @@
   <p:extLst>
     <p:ext uri="{521415D9-36F7-43E2-AB2F-B90AF26B5E84}">
       <p14:sectionLst xmlns:p14="http://schemas.microsoft.com/office/powerpoint/2010/main">
-        <p14:section name="Apertura" id="{0ca0ccab-ae8f-393d-f5b1-f62a80568825}">
+        <p14:section name="Apertura" id="{536758cd-361e-599a-d58e-122eba8361a3}">
           <p14:sldIdLst>
             <p14:sldId id="256"/>
             <p14:sldId id="257"/>
           </p14:sldIdLst>
         </p14:section>
-        <p14:section name="Altre codifiche per gli interi con segno" id="{df39a300-cba6-22ef-c2c9-4dfb8c119f72}">
+        <p14:section name="Altre codifiche per gli interi con segno" id="{203b12cb-2807-4f0f-e78f-86b784e26ba6}">
           <p14:sldIdLst>
             <p14:sldId id="258"/>
             <p14:sldId id="259"/>
@@ -140,13 +140,13 @@
             <p14:sldId id="261"/>
           </p14:sldIdLst>
         </p14:section>
-        <p14:section name="Virgola fissa" id="{34cbc123-6a27-a764-380a-4195b009a58a}">
+        <p14:section name="Virgola fissa" id="{a659c8a0-ca49-2ac5-486f-2f446c14f0d1}">
           <p14:sldIdLst>
             <p14:sldId id="262"/>
             <p14:sldId id="263"/>
           </p14:sldIdLst>
         </p14:section>
-        <p14:section name="Virgola mobile" id="{3738cd0e-c699-a14b-a48f-000dafd68f2d}">
+        <p14:section name="Virgola mobile" id="{24db0f13-1447-a0b6-fc50-bfea36d2ab27}">
           <p14:sldIdLst>
             <p14:sldId id="264"/>
             <p14:sldId id="265"/>
@@ -156,7 +156,7 @@
             <p14:sldId id="269"/>
           </p14:sldIdLst>
         </p14:section>
-        <p14:section name="Ritorno alla macchina" id="{bf28a8a1-6242-70b7-2190-2e1cd800a70e}">
+        <p14:section name="Ritorno alla macchina" id="{efe0619c-1366-e977-25af-204b96d4dc68}">
           <p14:sldIdLst>
             <p14:sldId id="270"/>
             <p14:sldId id="271"/>
@@ -571,6 +571,8 @@
             <a:r>
               <a:rPr lang="en-US" dirty="0"/>
               <a:t>La lezione precedente trattava i numeri interi. Questa tratta i numeri con una parte frazionaria, e parte da un problema pratico: una palla che deve spostarsi di meno di un pixel per frame, su un processore che non ha istruzioni per i numeri reali. La soluzione, la virgola fissa, usa solo ciò che già conoscete. La virgola mobile compare poi come risposta generale, con lo standard seguito da ogni calcolatore, IEEE 754.
+Stato di apprendimento: DA COMPRENDERE OGGI, alla fine di questa lezione lo spiegate, lo seguite passo passo e lo applicate da soli; DA UTILIZZARE OGGI, oggi seguite e usate la ricetta; come funziona dentro si spiega più avanti, o non fa parte del corso; DA COMPRENDERE PIÙ AVANTI, riconoscete il nome e lo scopo; lo spiega una lezione successiva. Una slide senza etichetta è contesto: una storia, un esempio, una domanda, un esercizio.
+Stato di apprendimento di questa lezione. DA COMPRENDERE OGGI: la virgola fissa; complemento a uno ed eccesso k; la virgola mobile IEEE 754; il nome RV32IMAC. DA UTILIZZARE OGGI: il programma completo, gli strumenti di PRG32 (si usa, non si studia, in questo corso). DA COMPRENDERE PIÙ AVANTI: niente. Una slide senza etichetta è contesto: una storia, un esempio, una domanda, un esercizio.
 Per il docente: Spirale: la lezione si apre con una palla che deve muoversi di meno di un pixel per frame su un processore senza unità in virgola mobile. La virgola fissa risolve il problema; la virgola mobile viene poi presentata come risposta generale, con IEEE 754.</a:t>
             </a:r>
             <a:endParaRPr lang="en-US" dirty="0"/>
@@ -660,6 +662,7 @@
             <a:r>
               <a:rPr lang="en-US" dirty="0"/>
               <a:t>In virgola mobile la distanza tra due numeri rappresentabili consecutivi non è costante. Vicino a zero sono vicinissimi; vicino al limite superiore sono molto distanti. L'errore assoluto cresce quindi con la grandezza del numero. Ciò che resta costante è l'errore relativo, perché ogni numero ha lo stesso numero di cifre significative: quattro in questo esempio. È l'opposto della virgola fissa, dove l'errore assoluto è costante e quello relativo diventa grande vicino a zero.
+DA COMPRENDERE OGGI: la virgola mobile IEEE 754.
 Per il docente: È l'opposto della virgola fissa, dove l'errore assoluto è costante e quello relativo esplode vicino a zero.</a:t>
             </a:r>
             <a:endParaRPr lang="en-US" dirty="0"/>
@@ -749,6 +752,7 @@
             <a:r>
               <a:rPr lang="en-US" dirty="0"/>
               <a:t>Il formato a singola precisione di IEEE 754 divide 32 bit in tre campi: un bit di segno, otto di esponente, ventitré di frazione. Il valore è dato dalla formula al centro. Due dettagli meritano attenzione. Una mantissa binaria normalizzata comincia sempre con 1, quindi quel bit non si memorizza: è il bit nascosto, e regala un bit di precisione in più. E l'esponente è memorizzato in eccesso 127, la codifica della sezione precedente, così gli esponenti si confrontano come numeri naturali.
+DA COMPRENDERE OGGI: la virgola mobile IEEE 754.
 Per il docente: IEEE 754 è del 1985 (rivisto nel 2008 e nel 2019). Prima ogni costruttore aveva il proprio formato e i programmi davano risultati diversi su macchine diverse.</a:t>
             </a:r>
             <a:endParaRPr lang="en-US" dirty="0"/>
@@ -838,6 +842,7 @@
             <a:r>
               <a:rPr lang="en-US" dirty="0"/>
               <a:t>Un esempio completo: meno 5,125. Si convertono in binario le due parti: 5 è 101 e 0,125 è 0,001, quindi il numero è 101,001. Si normalizza spostando la virgola di due posti: 1,01001 per 2 alla 2. Il bit di segno è 1. Il campo esponente è 2 più 127, 129, cioè 1000 0001. La frazione è 01001 seguita da zeri, senza l'1 iniziale. Mettendo insieme i tre campi e raggruppando a quattro a quattro si ottiene 0xC0A40000. Rifatelo su carta, poi provate con un altro numero.
+DA COMPRENDERE OGGI: la virgola mobile IEEE 754.
 Per il docente: Verificare il raggruppamento in nibble: 1100 = C, 0000 = 0, 1010 = A, 0100 = 4, poi zeri. Qui sono unite tre slide della presentazione originale.</a:t>
             </a:r>
             <a:endParaRPr lang="en-US" dirty="0"/>
@@ -927,6 +932,7 @@
             <a:r>
               <a:rPr lang="en-US" dirty="0"/>
               <a:t>Singola e doppia precisione a confronto. La doppia precisione ha 64 bit, 11 di esponente in eccesso 1023 e 52 di frazione. Due righe vanno ricordate come ordini di grandezza: la singola precisione dà circa 7 cifre decimali significative e arriva a circa 10 alla 38; la doppia ne dà circa 16 e arriva a circa 10 alla 308. I tipi float e double del linguaggio C sono questi due formati.
+DA COMPRENDERE OGGI: la virgola mobile IEEE 754.
 Per il docente: Correzioni alla tabella originale: l'esponente in doppia precisione è in eccesso 1023 (non 1024), e gli intervalli decimali sono circa 10^38 e 10^308.</a:t>
             </a:r>
             <a:endParaRPr lang="en-US" dirty="0"/>
@@ -1016,6 +1022,7 @@
             <a:r>
               <a:rPr lang="en-US" dirty="0"/>
               <a:t>Non tutte le configurazioni sono numeri ordinari. Un campo esponente compreso tra i due estremi è un numero normalizzato. Un esponente di tutti zeri significa zero, se anche la frazione è zero, oppure un numero denormalizzato, che riempie il vuoto attorno allo zero con precisione decrescente. Un esponente di tutti uni significa infinito, se la frazione è zero, oppure NaN, «non un numero», il risultato di un'operazione non valida come zero diviso zero. Notate che gli zeri sono due, più e meno, e che NaN non è uguale a nulla, nemmeno a se stesso.
+DA COMPRENDERE OGGI: la virgola mobile IEEE 754.
 Per il docente: I numeri denormalizzati (subnormali) riempiono il vuoto dell'underflow attorno allo zero con precisione via via decrescente. 1/0 dà infinito; 0/0 e la radice quadrata di -1 danno NaN. NaN non è uguale a nulla, nemmeno a se stesso.</a:t>
             </a:r>
             <a:endParaRPr lang="en-US" dirty="0"/>
@@ -1105,6 +1112,7 @@
             <a:r>
               <a:rPr lang="en-US" dirty="0"/>
               <a:t>RISC-V tratta la virgola mobile con due estensioni facoltative, F per la singola precisione e D per la doppia: aggiungono trentadue registri, da f0 a f31, e istruzioni come fadd.s. Il processore del kit, RV32IMAC, non ha né l'una né l'altra. Un programma C può comunque usare float, ma ogni operazione diventa la chiamata di una routine software che costa decine o centinaia di istruzioni intere. Per questo i giochi PRG32 usano interi e virgola fissa: sono veloci, abbastanza esatti, e visibili nel debugger.
+DA COMPRENDERE OGGI: la virgola mobile IEEE 754.
 Per il docente: Le routine software realizzano esattamente l'algoritmo di questa lezione con scorrimenti, maschere e somme intere: un buon esercizio di lettura per la fine del corso.</a:t>
             </a:r>
             <a:endParaRPr lang="en-US" dirty="0"/>
@@ -1194,6 +1202,7 @@
             <a:r>
               <a:rPr lang="en-US" dirty="0"/>
               <a:t>Il nome RV32IMAC si può ora leggere lettera per lettera. RV32I è la base: registri a 32 bit e istruzioni intere. M aggiunge moltiplicazione e divisione. A aggiunge le istruzioni atomiche per condividere dati in sicurezza tra task. C aggiunge le codifiche compresse, a 16 bit, delle istruzioni più comuni. F e D, le estensioni in virgola mobile, mancano. Questa modularità è una scelta di progetto di RISC-V: una piccola base obbligatoria ed estensioni facoltative, così che la stessa architettura vada bene per un microcontrollore economico e per un supercalcolatore.
+DA COMPRENDERE OGGI: il nome RV32IMAC.
 Per il docente: RISC-V è modulare: una piccola base obbligatoria più estensioni facoltative. Un microcontrollore prende ciò che gli serve; è una delle ragioni per cui la stessa architettura va da un chip da due euro a un supercalcolatore.</a:t>
             </a:r>
             <a:endParaRPr lang="en-US" dirty="0"/>
@@ -1641,6 +1650,7 @@
             <a:r>
               <a:rPr lang="en-US" dirty="0"/>
               <a:t>Cinque conclusioni. Gli interi hanno diverse rappresentazioni, scelte in base all'uso. La virgola fissa memorizza una frazione come intero scalato: errore assoluto costante, velocità degli interi. La virgola mobile memorizza mantissa ed esponente: intervallo enorme, errore relativo costante. IEEE 754 è lo standard universale, con configurazioni speciali per zero, infinito e NaN. E su un processore senza l'estensione F la virgola fissa è la scelta naturale. Ora viene la prima parte di Verm1, dove le ultime quattro lezioni si mettono al lavoro.
+Stato di apprendimento, riepilogo. DA COMPRENDERE OGGI: la virgola fissa; complemento a uno ed eccesso k; la virgola mobile IEEE 754; il nome RV32IMAC. DA UTILIZZARE OGGI: il programma completo, gli strumenti di PRG32 (si usa, non si studia, in questo corso). DA COMPRENDERE PIÙ AVANTI: niente. Una slide senza etichetta è contesto: una storia, un esempio, una domanda, un esercizio.
 Per il docente: A seguire: Verm1, parte 1, dove le prime quattro lezioni vanno a lavorare in un programma vero. Poi l'algebra di Boole.</a:t>
             </a:r>
             <a:endParaRPr lang="en-US" dirty="0"/>
@@ -1730,6 +1740,7 @@
             <a:r>
               <a:rPr lang="en-US" dirty="0"/>
               <a:t>In complemento a uno un numero negativo si ottiene invertendo ogni bit del positivo: 6 è 0110, meno 6 è 1001. Cambiare segno non potrebbe essere più semplice. Il prezzo è lo stesso del segno e modulo: lo zero ha due rappresentazioni, 0000 e 1111, e l'intervallo è simmetrico, da meno 7 a più 7 su quattro bit. L'istruzione not di RISC-V calcola esattamente il complemento a uno di un registro.
+DA COMPRENDERE OGGI: complemento a uno ed eccesso k.
 Per il docente: Detto anche complemento alla base diminuita. La not bit a bit di RISC-V calcola esattamente questo.</a:t>
             </a:r>
             <a:endParaRPr lang="en-US" dirty="0"/>
@@ -1819,6 +1830,7 @@
             <a:r>
               <a:rPr lang="en-US" dirty="0"/>
               <a:t>La somma in complemento a uno funziona con l'addizionatore ordinario, con una correzione: quando c'è un riporto uscente dal bit più a sinistra, al risultato va sommato 1. Si chiama riporto circolare. Il primo esempio non richiede correzione. Nel secondo e nel terzo il riporto uscente fa il giro e viene sommato. Il passo in più e il doppio zero sono le ragioni per cui ha vinto il complemento a due, in cui il riporto si scarta e basta.
+DA COMPRENDERE OGGI: complemento a uno ed eccesso k.
 Per il docente: Le slide originali chiamano il riporto «overflow nell'aritmetica degli interi positivi»: è il riporto uscente dell'addizionatore dei naturali, reinterpretato come necessità di una correzione.</a:t>
             </a:r>
             <a:endParaRPr lang="en-US" dirty="0"/>
@@ -1908,6 +1920,7 @@
             <a:r>
               <a:rPr lang="en-US" dirty="0"/>
               <a:t>In eccesso k ogni numero è traslato verso l'alto di una costante: X = x + k. Con quattro bit e k = 8, la configurazione 0000 significa meno 8, 1000 significa zero e 1111 significa più 7. La proprietà preziosa è che l'ordine si conserva: a un numero maggiore corrisponde sempre una configurazione maggiore, quindi due numeri con segno si confrontano come se fossero naturali. L'aritmetica è meno comoda, perché ogni somma va corretta. È la codifica dell'esponente nei numeri in virgola mobile.
+DA COMPRENDERE OGGI: complemento a uno ed eccesso k.
 Per il docente: Eccesso 8 su quattro bit: 0000 = -8, 1000 = 0, 1111 = +7. Si confronti con il complemento a due: stesso intervallo, con il bit più significativo invertito.</a:t>
             </a:r>
             <a:endParaRPr lang="en-US" dirty="0"/>
@@ -1997,6 +2010,7 @@
             <a:r>
               <a:rPr lang="en-US" dirty="0"/>
               <a:t>La tabella della Lezione 05 con due colonne in più: le stesse sedici configurazioni lette senza segno, in segno e modulo, in complemento a uno, in complemento a due e in eccesso 8. Tre osservazioni. Segno e modulo e complemento a uno hanno due zeri, evidenziati. Complemento a due ed eccesso 8 coprono lo stesso intervallo, da meno 8 a più 7, e differiscono solo nel bit più a sinistra. E l'eccesso 8 è l'unica colonna in cui i valori crescono con regolarità dall'alto al basso della tabella.
+DA COMPRENDERE OGGI: complemento a uno ed eccesso k.
 Per il docente: Questa tabella sostituisce la figura di confronto della presentazione originale («Numeri relativi: complementi»).</a:t>
             </a:r>
             <a:endParaRPr lang="en-US" dirty="0"/>
@@ -2086,6 +2100,7 @@
             <a:r>
               <a:rPr lang="en-US" dirty="0"/>
               <a:t>In virgola fissa la parte intera e la parte frazionaria stanno fianco a fianco in una parola, e la posizione della virgola è fissa. Non è memorizzata da nessuna parte: è un accordo che il programma conosce. Se f bit sono riservati alla frazione, la parola contiene il numero moltiplicato per 2 alla f, e il passo più piccolo rappresentabile, la risoluzione, è 2 alla meno f. La notazione Qm.f dice come sono divisi i bit: Q24.8 significa 24 bit interi e 8 bit frazionari.
+DA COMPRENDERE OGGI: la virgola fissa.
 Per il docente: La virgola fissa è il modo in cui giochi, audio e software di controllo trattano le frazioni sui processori senza unità in virgola mobile. È anche il modo in cui si dovrebbe memorizzare il denaro: centesimi interi.</a:t>
             </a:r>
             <a:endParaRPr lang="en-US" dirty="0"/>
@@ -2175,6 +2190,7 @@
             <a:r>
               <a:rPr lang="en-US" dirty="0"/>
               <a:t>I numeri reali sono densi: tra due qualsiasi ce ne sono infiniti altri, quindi con un numero finito di bit la maggior parte non si può rappresentare, e ciascuno è sostituito dal più vicino tra quelli rappresentabili. In Q24.8 il numero 0,1 diventa 26/256, circa 0,1016. L'errore è al più metà della risoluzione. Un numero troppo vicino a zero diventa zero: è l'underflow, ed è il motivo per cui una velocità di 0,001 pixel per frame lascerebbe ferma la palla. In virgola fissa l'errore assoluto è lo stesso ovunque.
+DA COMPRENDERE OGGI: la virgola fissa.
 Per il docente: 0,1 x 256 = 25,6, arrotondato a 26. Con SPEED_Q8 = 1 la palla si muove di 1/256 di pixel per frame; una velocità di 0,001 pixel per frame va in underflow a zero e la palla non si muove mai.</a:t>
             </a:r>
             <a:endParaRPr lang="en-US" dirty="0"/>
@@ -2264,6 +2280,7 @@
             <a:r>
               <a:rPr lang="en-US" dirty="0"/>
               <a:t>Un numero reale si scrive come una coppia: una mantissa m e un esponente e, tali che x è m per la base elevata a e. È la notazione scientifica del laboratorio di fisica. La virgola è «mobile» perché è l'esponente a dire dove si trova. Poiché lo stesso numero ha infinite coppie di questo tipo, se ne sceglie una con una regola, la normalizzazione: la virgola si mette subito dopo la prima cifra significativa, così 346,09801 diventa 3,4609801 con esponente 2.
+DA COMPRENDERE OGGI: la virgola mobile IEEE 754.
 Per il docente: In altre parole, la notazione scientifica. La virgola fissa spende i bit su un intervallo fisso; la virgola mobile ne spende alcuni per dire dove si trova l'intervallo.</a:t>
             </a:r>
             <a:endParaRPr lang="en-US" dirty="0"/>
@@ -3401,6 +3418,420 @@
       </p:pic>
       <p:sp>
         <p:nvSpPr>
+          <p:cNvPr id="15" name="Shape 12"/>
+          <p:cNvSpPr/>
+          <p:nvPr/>
+        </p:nvSpPr>
+        <p:spPr>
+          <a:xfrm>
+            <a:off x="8910777" y="91440"/>
+            <a:ext cx="2732278" cy="274320"/>
+          </a:xfrm>
+          <a:prstGeom prst="rect">
+            <a:avLst/>
+          </a:prstGeom>
+          <a:solidFill>
+            <a:srgbClr val="F3E8FF"/>
+          </a:solidFill>
+          <a:ln w="12700">
+            <a:solidFill>
+              <a:srgbClr val="7E22CE"/>
+            </a:solidFill>
+            <a:prstDash val="dash"/>
+          </a:ln>
+        </p:spPr>
+      </p:sp>
+      <p:sp>
+        <p:nvSpPr>
+          <p:cNvPr id="16" name="Shape 13"/>
+          <p:cNvSpPr/>
+          <p:nvPr/>
+        </p:nvSpPr>
+        <p:spPr>
+          <a:xfrm>
+            <a:off x="8938209" y="128016"/>
+            <a:ext cx="45720" cy="45720"/>
+          </a:xfrm>
+          <a:prstGeom prst="rect">
+            <a:avLst/>
+          </a:prstGeom>
+          <a:solidFill>
+            <a:srgbClr val="7E22CE"/>
+          </a:solidFill>
+          <a:ln w="12700">
+            <a:solidFill>
+              <a:srgbClr val="7E22CE"/>
+            </a:solidFill>
+            <a:prstDash val="solid"/>
+          </a:ln>
+        </p:spPr>
+      </p:sp>
+      <p:sp>
+        <p:nvSpPr>
+          <p:cNvPr id="17" name="Shape 14"/>
+          <p:cNvSpPr/>
+          <p:nvPr/>
+        </p:nvSpPr>
+        <p:spPr>
+          <a:xfrm>
+            <a:off x="8938209" y="205740"/>
+            <a:ext cx="45720" cy="45720"/>
+          </a:xfrm>
+          <a:prstGeom prst="rect">
+            <a:avLst/>
+          </a:prstGeom>
+          <a:solidFill>
+            <a:srgbClr val="7E22CE"/>
+          </a:solidFill>
+          <a:ln w="12700">
+            <a:solidFill>
+              <a:srgbClr val="7E22CE"/>
+            </a:solidFill>
+            <a:prstDash val="solid"/>
+          </a:ln>
+        </p:spPr>
+      </p:sp>
+      <p:sp>
+        <p:nvSpPr>
+          <p:cNvPr id="18" name="Shape 15"/>
+          <p:cNvSpPr/>
+          <p:nvPr/>
+        </p:nvSpPr>
+        <p:spPr>
+          <a:xfrm>
+            <a:off x="8938209" y="283464"/>
+            <a:ext cx="45720" cy="45720"/>
+          </a:xfrm>
+          <a:prstGeom prst="rect">
+            <a:avLst/>
+          </a:prstGeom>
+          <a:solidFill>
+            <a:srgbClr val="7E22CE"/>
+          </a:solidFill>
+          <a:ln w="12700">
+            <a:solidFill>
+              <a:srgbClr val="7E22CE"/>
+            </a:solidFill>
+            <a:prstDash val="solid"/>
+          </a:ln>
+        </p:spPr>
+      </p:sp>
+      <p:pic>
+        <p:nvPicPr>
+          <p:cNvPr id="19" name="Image 1" descr="preencoded.png">    </p:cNvPr>
+          <p:cNvPicPr>
+            <a:picLocks noChangeAspect="1"/>
+          </p:cNvPicPr>
+          <p:nvPr/>
+        </p:nvPicPr>
+        <p:blipFill>
+          <a:blip r:embed="rId2"/>
+          <a:stretch>
+            <a:fillRect/>
+          </a:stretch>
+        </p:blipFill>
+        <p:spPr>
+          <a:xfrm>
+            <a:off x="9038793" y="128016"/>
+            <a:ext cx="201168" cy="201168"/>
+          </a:xfrm>
+          <a:prstGeom prst="rect">
+            <a:avLst/>
+          </a:prstGeom>
+        </p:spPr>
+      </p:pic>
+      <p:sp>
+        <p:nvSpPr>
+          <p:cNvPr id="20" name="Text 16"/>
+          <p:cNvSpPr txBox="1"/>
+          <p:nvPr/>
+        </p:nvSpPr>
+        <p:spPr>
+          <a:xfrm>
+            <a:off x="9294825" y="91440"/>
+            <a:ext cx="2311654" cy="274320"/>
+          </a:xfrm>
+          <a:prstGeom prst="rect">
+            <a:avLst/>
+          </a:prstGeom>
+          <a:noFill/>
+          <a:ln/>
+        </p:spPr>
+        <p:txBody>
+          <a:bodyPr wrap="square" lIns="0" tIns="0" rIns="0" bIns="0" rtlCol="0" anchor="ctr"/>
+          <a:lstStyle/>
+          <a:p>
+            <a:pPr indent="0" marL="0">
+              <a:buNone/>
+            </a:pPr>
+            <a:r>
+              <a:rPr lang="en-US" sz="1100" b="1" dirty="0">
+                <a:solidFill>
+                  <a:srgbClr val="6B21A8"/>
+                </a:solidFill>
+                <a:latin typeface="Calibri" pitchFamily="34" charset="0"/>
+                <a:ea typeface="Calibri" pitchFamily="34" charset="-122"/>
+                <a:cs typeface="Calibri" pitchFamily="34" charset="-120"/>
+              </a:rPr>
+              <a:t>DA COMPRENDERE PIÙ AVANTI</a:t>
+            </a:r>
+            <a:endParaRPr lang="en-US" sz="1100" dirty="0"/>
+          </a:p>
+        </p:txBody>
+      </p:sp>
+      <p:sp>
+        <p:nvSpPr>
+          <p:cNvPr id="21" name="Shape 17"/>
+          <p:cNvSpPr/>
+          <p:nvPr/>
+        </p:nvSpPr>
+        <p:spPr>
+          <a:xfrm>
+            <a:off x="6675069" y="91440"/>
+            <a:ext cx="2125980" cy="274320"/>
+          </a:xfrm>
+          <a:prstGeom prst="rect">
+            <a:avLst/>
+          </a:prstGeom>
+          <a:solidFill>
+            <a:srgbClr val="FEF3C7"/>
+          </a:solidFill>
+          <a:ln w="12700">
+            <a:solidFill>
+              <a:srgbClr val="B45309"/>
+            </a:solidFill>
+            <a:prstDash val="solid"/>
+          </a:ln>
+        </p:spPr>
+      </p:sp>
+      <p:sp>
+        <p:nvSpPr>
+          <p:cNvPr id="22" name="Shape 18"/>
+          <p:cNvSpPr/>
+          <p:nvPr/>
+        </p:nvSpPr>
+        <p:spPr>
+          <a:xfrm>
+            <a:off x="6675069" y="91440"/>
+            <a:ext cx="27432" cy="274320"/>
+          </a:xfrm>
+          <a:prstGeom prst="rect">
+            <a:avLst/>
+          </a:prstGeom>
+          <a:solidFill>
+            <a:srgbClr val="B45309"/>
+          </a:solidFill>
+          <a:ln w="12700">
+            <a:solidFill>
+              <a:srgbClr val="B45309"/>
+            </a:solidFill>
+            <a:prstDash val="solid"/>
+          </a:ln>
+        </p:spPr>
+      </p:sp>
+      <p:sp>
+        <p:nvSpPr>
+          <p:cNvPr id="23" name="Shape 19"/>
+          <p:cNvSpPr/>
+          <p:nvPr/>
+        </p:nvSpPr>
+        <p:spPr>
+          <a:xfrm>
+            <a:off x="6729933" y="91440"/>
+            <a:ext cx="27432" cy="274320"/>
+          </a:xfrm>
+          <a:prstGeom prst="rect">
+            <a:avLst/>
+          </a:prstGeom>
+          <a:solidFill>
+            <a:srgbClr val="B45309"/>
+          </a:solidFill>
+          <a:ln w="12700">
+            <a:solidFill>
+              <a:srgbClr val="B45309"/>
+            </a:solidFill>
+            <a:prstDash val="solid"/>
+          </a:ln>
+        </p:spPr>
+      </p:sp>
+      <p:pic>
+        <p:nvPicPr>
+          <p:cNvPr id="24" name="Image 2" descr="preencoded.png">    </p:cNvPr>
+          <p:cNvPicPr>
+            <a:picLocks noChangeAspect="1"/>
+          </p:cNvPicPr>
+          <p:nvPr/>
+        </p:nvPicPr>
+        <p:blipFill>
+          <a:blip r:embed="rId3"/>
+          <a:stretch>
+            <a:fillRect/>
+          </a:stretch>
+        </p:blipFill>
+        <p:spPr>
+          <a:xfrm>
+            <a:off x="6803085" y="128016"/>
+            <a:ext cx="201168" cy="201168"/>
+          </a:xfrm>
+          <a:prstGeom prst="rect">
+            <a:avLst/>
+          </a:prstGeom>
+        </p:spPr>
+      </p:pic>
+      <p:sp>
+        <p:nvSpPr>
+          <p:cNvPr id="25" name="Text 20"/>
+          <p:cNvSpPr txBox="1"/>
+          <p:nvPr/>
+        </p:nvSpPr>
+        <p:spPr>
+          <a:xfrm>
+            <a:off x="7059117" y="91440"/>
+            <a:ext cx="1705356" cy="274320"/>
+          </a:xfrm>
+          <a:prstGeom prst="rect">
+            <a:avLst/>
+          </a:prstGeom>
+          <a:noFill/>
+          <a:ln/>
+        </p:spPr>
+        <p:txBody>
+          <a:bodyPr wrap="square" lIns="0" tIns="0" rIns="0" bIns="0" rtlCol="0" anchor="ctr"/>
+          <a:lstStyle/>
+          <a:p>
+            <a:pPr indent="0" marL="0">
+              <a:buNone/>
+            </a:pPr>
+            <a:r>
+              <a:rPr lang="en-US" sz="1100" b="1" dirty="0">
+                <a:solidFill>
+                  <a:srgbClr val="92400E"/>
+                </a:solidFill>
+                <a:latin typeface="Calibri" pitchFamily="34" charset="0"/>
+                <a:ea typeface="Calibri" pitchFamily="34" charset="-122"/>
+                <a:cs typeface="Calibri" pitchFamily="34" charset="-120"/>
+              </a:rPr>
+              <a:t>DA UTILIZZARE OGGI</a:t>
+            </a:r>
+            <a:endParaRPr lang="en-US" sz="1100" dirty="0"/>
+          </a:p>
+        </p:txBody>
+      </p:sp>
+      <p:sp>
+        <p:nvSpPr>
+          <p:cNvPr id="26" name="Shape 21"/>
+          <p:cNvSpPr/>
+          <p:nvPr/>
+        </p:nvSpPr>
+        <p:spPr>
+          <a:xfrm>
+            <a:off x="4352747" y="91440"/>
+            <a:ext cx="2212594" cy="274320"/>
+          </a:xfrm>
+          <a:prstGeom prst="rect">
+            <a:avLst/>
+          </a:prstGeom>
+          <a:solidFill>
+            <a:srgbClr val="E0F2FE"/>
+          </a:solidFill>
+          <a:ln w="12700">
+            <a:solidFill>
+              <a:srgbClr val="0369A1"/>
+            </a:solidFill>
+            <a:prstDash val="solid"/>
+          </a:ln>
+        </p:spPr>
+      </p:sp>
+      <p:sp>
+        <p:nvSpPr>
+          <p:cNvPr id="27" name="Shape 22"/>
+          <p:cNvSpPr/>
+          <p:nvPr/>
+        </p:nvSpPr>
+        <p:spPr>
+          <a:xfrm>
+            <a:off x="4352747" y="91440"/>
+            <a:ext cx="73152" cy="274320"/>
+          </a:xfrm>
+          <a:prstGeom prst="rect">
+            <a:avLst/>
+          </a:prstGeom>
+          <a:solidFill>
+            <a:srgbClr val="0369A1"/>
+          </a:solidFill>
+          <a:ln w="12700">
+            <a:solidFill>
+              <a:srgbClr val="0369A1"/>
+            </a:solidFill>
+            <a:prstDash val="solid"/>
+          </a:ln>
+        </p:spPr>
+      </p:sp>
+      <p:pic>
+        <p:nvPicPr>
+          <p:cNvPr id="28" name="Image 3" descr="preencoded.png">    </p:cNvPr>
+          <p:cNvPicPr>
+            <a:picLocks noChangeAspect="1"/>
+          </p:cNvPicPr>
+          <p:nvPr/>
+        </p:nvPicPr>
+        <p:blipFill>
+          <a:blip r:embed="rId4"/>
+          <a:stretch>
+            <a:fillRect/>
+          </a:stretch>
+        </p:blipFill>
+        <p:spPr>
+          <a:xfrm>
+            <a:off x="4480763" y="128016"/>
+            <a:ext cx="201168" cy="201168"/>
+          </a:xfrm>
+          <a:prstGeom prst="rect">
+            <a:avLst/>
+          </a:prstGeom>
+        </p:spPr>
+      </p:pic>
+      <p:sp>
+        <p:nvSpPr>
+          <p:cNvPr id="29" name="Text 23"/>
+          <p:cNvSpPr txBox="1"/>
+          <p:nvPr/>
+        </p:nvSpPr>
+        <p:spPr>
+          <a:xfrm>
+            <a:off x="4736795" y="91440"/>
+            <a:ext cx="1791970" cy="274320"/>
+          </a:xfrm>
+          <a:prstGeom prst="rect">
+            <a:avLst/>
+          </a:prstGeom>
+          <a:noFill/>
+          <a:ln/>
+        </p:spPr>
+        <p:txBody>
+          <a:bodyPr wrap="square" lIns="0" tIns="0" rIns="0" bIns="0" rtlCol="0" anchor="ctr"/>
+          <a:lstStyle/>
+          <a:p>
+            <a:pPr indent="0" marL="0">
+              <a:buNone/>
+            </a:pPr>
+            <a:r>
+              <a:rPr lang="en-US" sz="1100" b="1" dirty="0">
+                <a:solidFill>
+                  <a:srgbClr val="075985"/>
+                </a:solidFill>
+                <a:latin typeface="Calibri" pitchFamily="34" charset="0"/>
+                <a:ea typeface="Calibri" pitchFamily="34" charset="-122"/>
+                <a:cs typeface="Calibri" pitchFamily="34" charset="-120"/>
+              </a:rPr>
+              <a:t>DA COMPRENDERE OGGI</a:t>
+            </a:r>
+            <a:endParaRPr lang="en-US" sz="1100" dirty="0"/>
+          </a:p>
+        </p:txBody>
+      </p:sp>
+      <p:sp>
+        <p:nvSpPr>
           <p:cNvPr id="25" name="Slide Number Placeholder 0"/>
           <p:cNvSpPr>
             <a:spLocks noGrp="1"/>
@@ -3995,6 +4426,133 @@
       </p:sp>
       <p:sp>
         <p:nvSpPr>
+          <p:cNvPr id="16" name="Shape 14"/>
+          <p:cNvSpPr/>
+          <p:nvPr/>
+        </p:nvSpPr>
+        <p:spPr>
+          <a:xfrm>
+            <a:off x="7526350" y="91440"/>
+            <a:ext cx="4116705" cy="274320"/>
+          </a:xfrm>
+          <a:prstGeom prst="rect">
+            <a:avLst/>
+          </a:prstGeom>
+          <a:solidFill>
+            <a:srgbClr val="E0F2FE"/>
+          </a:solidFill>
+          <a:ln w="12700">
+            <a:solidFill>
+              <a:srgbClr val="0369A1"/>
+            </a:solidFill>
+            <a:prstDash val="solid"/>
+          </a:ln>
+        </p:spPr>
+      </p:sp>
+      <p:sp>
+        <p:nvSpPr>
+          <p:cNvPr id="17" name="Shape 15"/>
+          <p:cNvSpPr/>
+          <p:nvPr/>
+        </p:nvSpPr>
+        <p:spPr>
+          <a:xfrm>
+            <a:off x="7526350" y="91440"/>
+            <a:ext cx="73152" cy="274320"/>
+          </a:xfrm>
+          <a:prstGeom prst="rect">
+            <a:avLst/>
+          </a:prstGeom>
+          <a:solidFill>
+            <a:srgbClr val="0369A1"/>
+          </a:solidFill>
+          <a:ln w="12700">
+            <a:solidFill>
+              <a:srgbClr val="0369A1"/>
+            </a:solidFill>
+            <a:prstDash val="solid"/>
+          </a:ln>
+        </p:spPr>
+      </p:sp>
+      <p:pic>
+        <p:nvPicPr>
+          <p:cNvPr id="18" name="Image 0" descr="preencoded.png">    </p:cNvPr>
+          <p:cNvPicPr>
+            <a:picLocks noChangeAspect="1"/>
+          </p:cNvPicPr>
+          <p:nvPr/>
+        </p:nvPicPr>
+        <p:blipFill>
+          <a:blip r:embed="rId1"/>
+          <a:stretch>
+            <a:fillRect/>
+          </a:stretch>
+        </p:blipFill>
+        <p:spPr>
+          <a:xfrm>
+            <a:off x="7654366" y="128016"/>
+            <a:ext cx="201168" cy="201168"/>
+          </a:xfrm>
+          <a:prstGeom prst="rect">
+            <a:avLst/>
+          </a:prstGeom>
+        </p:spPr>
+      </p:pic>
+      <p:sp>
+        <p:nvSpPr>
+          <p:cNvPr id="19" name="Text 16"/>
+          <p:cNvSpPr txBox="1"/>
+          <p:nvPr/>
+        </p:nvSpPr>
+        <p:spPr>
+          <a:xfrm>
+            <a:off x="7910398" y="91440"/>
+            <a:ext cx="3696081" cy="274320"/>
+          </a:xfrm>
+          <a:prstGeom prst="rect">
+            <a:avLst/>
+          </a:prstGeom>
+          <a:noFill/>
+          <a:ln/>
+        </p:spPr>
+        <p:txBody>
+          <a:bodyPr wrap="square" lIns="0" tIns="0" rIns="0" bIns="0" rtlCol="0" anchor="ctr"/>
+          <a:lstStyle/>
+          <a:p>
+            <a:pPr indent="0" marL="0">
+              <a:buNone/>
+            </a:pPr>
+            <a:r>
+              <a:rPr lang="en-US" sz="1100" b="1" dirty="0">
+                <a:solidFill>
+                  <a:srgbClr val="075985"/>
+                </a:solidFill>
+                <a:latin typeface="Calibri" pitchFamily="34" charset="0"/>
+                <a:ea typeface="Calibri" pitchFamily="34" charset="-122"/>
+                <a:cs typeface="Calibri" pitchFamily="34" charset="-120"/>
+              </a:rPr>
+              <a:t>DA COMPRENDERE OGGI</a:t>
+            </a:r>
+            <a:pPr indent="0" marL="0">
+              <a:buNone/>
+            </a:pPr>
+            <a:r>
+              <a:rPr lang="en-US" sz="1100" dirty="0">
+                <a:solidFill>
+                  <a:srgbClr val="075985"/>
+                </a:solidFill>
+                <a:latin typeface="Calibri" pitchFamily="34" charset="0"/>
+                <a:ea typeface="Calibri" pitchFamily="34" charset="-122"/>
+                <a:cs typeface="Calibri" pitchFamily="34" charset="-120"/>
+              </a:rPr>
+              <a:t> · la virgola mobile IEEE 754</a:t>
+            </a:r>
+            <a:endParaRPr lang="en-US" sz="1100" dirty="0"/>
+          </a:p>
+        </p:txBody>
+      </p:sp>
+      <p:sp>
+        <p:nvSpPr>
           <p:cNvPr id="25" name="Slide Number Placeholder 0"/>
           <p:cNvSpPr>
             <a:spLocks noGrp="1"/>
@@ -4914,6 +5472,133 @@
       </p:sp>
       <p:sp>
         <p:nvSpPr>
+          <p:cNvPr id="23" name="Shape 21"/>
+          <p:cNvSpPr/>
+          <p:nvPr/>
+        </p:nvSpPr>
+        <p:spPr>
+          <a:xfrm>
+            <a:off x="7526350" y="91440"/>
+            <a:ext cx="4116705" cy="274320"/>
+          </a:xfrm>
+          <a:prstGeom prst="rect">
+            <a:avLst/>
+          </a:prstGeom>
+          <a:solidFill>
+            <a:srgbClr val="E0F2FE"/>
+          </a:solidFill>
+          <a:ln w="12700">
+            <a:solidFill>
+              <a:srgbClr val="0369A1"/>
+            </a:solidFill>
+            <a:prstDash val="solid"/>
+          </a:ln>
+        </p:spPr>
+      </p:sp>
+      <p:sp>
+        <p:nvSpPr>
+          <p:cNvPr id="24" name="Shape 22"/>
+          <p:cNvSpPr/>
+          <p:nvPr/>
+        </p:nvSpPr>
+        <p:spPr>
+          <a:xfrm>
+            <a:off x="7526350" y="91440"/>
+            <a:ext cx="73152" cy="274320"/>
+          </a:xfrm>
+          <a:prstGeom prst="rect">
+            <a:avLst/>
+          </a:prstGeom>
+          <a:solidFill>
+            <a:srgbClr val="0369A1"/>
+          </a:solidFill>
+          <a:ln w="12700">
+            <a:solidFill>
+              <a:srgbClr val="0369A1"/>
+            </a:solidFill>
+            <a:prstDash val="solid"/>
+          </a:ln>
+        </p:spPr>
+      </p:sp>
+      <p:pic>
+        <p:nvPicPr>
+          <p:cNvPr id="25" name="Image 0" descr="preencoded.png">    </p:cNvPr>
+          <p:cNvPicPr>
+            <a:picLocks noChangeAspect="1"/>
+          </p:cNvPicPr>
+          <p:nvPr/>
+        </p:nvPicPr>
+        <p:blipFill>
+          <a:blip r:embed="rId1"/>
+          <a:stretch>
+            <a:fillRect/>
+          </a:stretch>
+        </p:blipFill>
+        <p:spPr>
+          <a:xfrm>
+            <a:off x="7654366" y="128016"/>
+            <a:ext cx="201168" cy="201168"/>
+          </a:xfrm>
+          <a:prstGeom prst="rect">
+            <a:avLst/>
+          </a:prstGeom>
+        </p:spPr>
+      </p:pic>
+      <p:sp>
+        <p:nvSpPr>
+          <p:cNvPr id="26" name="Text 23"/>
+          <p:cNvSpPr txBox="1"/>
+          <p:nvPr/>
+        </p:nvSpPr>
+        <p:spPr>
+          <a:xfrm>
+            <a:off x="7910398" y="91440"/>
+            <a:ext cx="3696081" cy="274320"/>
+          </a:xfrm>
+          <a:prstGeom prst="rect">
+            <a:avLst/>
+          </a:prstGeom>
+          <a:noFill/>
+          <a:ln/>
+        </p:spPr>
+        <p:txBody>
+          <a:bodyPr wrap="square" lIns="0" tIns="0" rIns="0" bIns="0" rtlCol="0" anchor="ctr"/>
+          <a:lstStyle/>
+          <a:p>
+            <a:pPr indent="0" marL="0">
+              <a:buNone/>
+            </a:pPr>
+            <a:r>
+              <a:rPr lang="en-US" sz="1100" b="1" dirty="0">
+                <a:solidFill>
+                  <a:srgbClr val="075985"/>
+                </a:solidFill>
+                <a:latin typeface="Calibri" pitchFamily="34" charset="0"/>
+                <a:ea typeface="Calibri" pitchFamily="34" charset="-122"/>
+                <a:cs typeface="Calibri" pitchFamily="34" charset="-120"/>
+              </a:rPr>
+              <a:t>DA COMPRENDERE OGGI</a:t>
+            </a:r>
+            <a:pPr indent="0" marL="0">
+              <a:buNone/>
+            </a:pPr>
+            <a:r>
+              <a:rPr lang="en-US" sz="1100" dirty="0">
+                <a:solidFill>
+                  <a:srgbClr val="075985"/>
+                </a:solidFill>
+                <a:latin typeface="Calibri" pitchFamily="34" charset="0"/>
+                <a:ea typeface="Calibri" pitchFamily="34" charset="-122"/>
+                <a:cs typeface="Calibri" pitchFamily="34" charset="-120"/>
+              </a:rPr>
+              <a:t> · la virgola mobile IEEE 754</a:t>
+            </a:r>
+            <a:endParaRPr lang="en-US" sz="1100" dirty="0"/>
+          </a:p>
+        </p:txBody>
+      </p:sp>
+      <p:sp>
+        <p:nvSpPr>
           <p:cNvPr id="25" name="Slide Number Placeholder 0"/>
           <p:cNvSpPr>
             <a:spLocks noGrp="1"/>
@@ -5748,6 +6433,133 @@
               <a:t>1100 0000 1010 0100 0000 0000 0000 0000  =  0xC0A40000</a:t>
             </a:r>
             <a:endParaRPr lang="en-US" sz="2100" dirty="0"/>
+          </a:p>
+        </p:txBody>
+      </p:sp>
+      <p:sp>
+        <p:nvSpPr>
+          <p:cNvPr id="20" name="Shape 18"/>
+          <p:cNvSpPr/>
+          <p:nvPr/>
+        </p:nvSpPr>
+        <p:spPr>
+          <a:xfrm>
+            <a:off x="7526350" y="91440"/>
+            <a:ext cx="4116705" cy="274320"/>
+          </a:xfrm>
+          <a:prstGeom prst="rect">
+            <a:avLst/>
+          </a:prstGeom>
+          <a:solidFill>
+            <a:srgbClr val="E0F2FE"/>
+          </a:solidFill>
+          <a:ln w="12700">
+            <a:solidFill>
+              <a:srgbClr val="0369A1"/>
+            </a:solidFill>
+            <a:prstDash val="solid"/>
+          </a:ln>
+        </p:spPr>
+      </p:sp>
+      <p:sp>
+        <p:nvSpPr>
+          <p:cNvPr id="21" name="Shape 19"/>
+          <p:cNvSpPr/>
+          <p:nvPr/>
+        </p:nvSpPr>
+        <p:spPr>
+          <a:xfrm>
+            <a:off x="7526350" y="91440"/>
+            <a:ext cx="73152" cy="274320"/>
+          </a:xfrm>
+          <a:prstGeom prst="rect">
+            <a:avLst/>
+          </a:prstGeom>
+          <a:solidFill>
+            <a:srgbClr val="0369A1"/>
+          </a:solidFill>
+          <a:ln w="12700">
+            <a:solidFill>
+              <a:srgbClr val="0369A1"/>
+            </a:solidFill>
+            <a:prstDash val="solid"/>
+          </a:ln>
+        </p:spPr>
+      </p:sp>
+      <p:pic>
+        <p:nvPicPr>
+          <p:cNvPr id="22" name="Image 0" descr="preencoded.png">    </p:cNvPr>
+          <p:cNvPicPr>
+            <a:picLocks noChangeAspect="1"/>
+          </p:cNvPicPr>
+          <p:nvPr/>
+        </p:nvPicPr>
+        <p:blipFill>
+          <a:blip r:embed="rId1"/>
+          <a:stretch>
+            <a:fillRect/>
+          </a:stretch>
+        </p:blipFill>
+        <p:spPr>
+          <a:xfrm>
+            <a:off x="7654366" y="128016"/>
+            <a:ext cx="201168" cy="201168"/>
+          </a:xfrm>
+          <a:prstGeom prst="rect">
+            <a:avLst/>
+          </a:prstGeom>
+        </p:spPr>
+      </p:pic>
+      <p:sp>
+        <p:nvSpPr>
+          <p:cNvPr id="23" name="Text 20"/>
+          <p:cNvSpPr txBox="1"/>
+          <p:nvPr/>
+        </p:nvSpPr>
+        <p:spPr>
+          <a:xfrm>
+            <a:off x="7910398" y="91440"/>
+            <a:ext cx="3696081" cy="274320"/>
+          </a:xfrm>
+          <a:prstGeom prst="rect">
+            <a:avLst/>
+          </a:prstGeom>
+          <a:noFill/>
+          <a:ln/>
+        </p:spPr>
+        <p:txBody>
+          <a:bodyPr wrap="square" lIns="0" tIns="0" rIns="0" bIns="0" rtlCol="0" anchor="ctr"/>
+          <a:lstStyle/>
+          <a:p>
+            <a:pPr indent="0" marL="0">
+              <a:buNone/>
+            </a:pPr>
+            <a:r>
+              <a:rPr lang="en-US" sz="1100" b="1" dirty="0">
+                <a:solidFill>
+                  <a:srgbClr val="075985"/>
+                </a:solidFill>
+                <a:latin typeface="Calibri" pitchFamily="34" charset="0"/>
+                <a:ea typeface="Calibri" pitchFamily="34" charset="-122"/>
+                <a:cs typeface="Calibri" pitchFamily="34" charset="-120"/>
+              </a:rPr>
+              <a:t>DA COMPRENDERE OGGI</a:t>
+            </a:r>
+            <a:pPr indent="0" marL="0">
+              <a:buNone/>
+            </a:pPr>
+            <a:r>
+              <a:rPr lang="en-US" sz="1100" dirty="0">
+                <a:solidFill>
+                  <a:srgbClr val="075985"/>
+                </a:solidFill>
+                <a:latin typeface="Calibri" pitchFamily="34" charset="0"/>
+                <a:ea typeface="Calibri" pitchFamily="34" charset="-122"/>
+                <a:cs typeface="Calibri" pitchFamily="34" charset="-120"/>
+              </a:rPr>
+              <a:t> · la virgola mobile IEEE 754</a:t>
+            </a:r>
+            <a:endParaRPr lang="en-US" sz="1100" dirty="0"/>
           </a:p>
         </p:txBody>
       </p:sp>
@@ -8151,6 +8963,133 @@
           </a:graphicData>
         </a:graphic>
       </p:graphicFrame>
+      <p:sp>
+        <p:nvSpPr>
+          <p:cNvPr id="4" name="Shape 1"/>
+          <p:cNvSpPr/>
+          <p:nvPr/>
+        </p:nvSpPr>
+        <p:spPr>
+          <a:xfrm>
+            <a:off x="7526350" y="91440"/>
+            <a:ext cx="4116705" cy="274320"/>
+          </a:xfrm>
+          <a:prstGeom prst="rect">
+            <a:avLst/>
+          </a:prstGeom>
+          <a:solidFill>
+            <a:srgbClr val="E0F2FE"/>
+          </a:solidFill>
+          <a:ln w="12700">
+            <a:solidFill>
+              <a:srgbClr val="0369A1"/>
+            </a:solidFill>
+            <a:prstDash val="solid"/>
+          </a:ln>
+        </p:spPr>
+      </p:sp>
+      <p:sp>
+        <p:nvSpPr>
+          <p:cNvPr id="5" name="Shape 2"/>
+          <p:cNvSpPr/>
+          <p:nvPr/>
+        </p:nvSpPr>
+        <p:spPr>
+          <a:xfrm>
+            <a:off x="7526350" y="91440"/>
+            <a:ext cx="73152" cy="274320"/>
+          </a:xfrm>
+          <a:prstGeom prst="rect">
+            <a:avLst/>
+          </a:prstGeom>
+          <a:solidFill>
+            <a:srgbClr val="0369A1"/>
+          </a:solidFill>
+          <a:ln w="12700">
+            <a:solidFill>
+              <a:srgbClr val="0369A1"/>
+            </a:solidFill>
+            <a:prstDash val="solid"/>
+          </a:ln>
+        </p:spPr>
+      </p:sp>
+      <p:pic>
+        <p:nvPicPr>
+          <p:cNvPr id="6" name="Image 0" descr="preencoded.png">    </p:cNvPr>
+          <p:cNvPicPr>
+            <a:picLocks noChangeAspect="1"/>
+          </p:cNvPicPr>
+          <p:nvPr/>
+        </p:nvPicPr>
+        <p:blipFill>
+          <a:blip r:embed="rId1"/>
+          <a:stretch>
+            <a:fillRect/>
+          </a:stretch>
+        </p:blipFill>
+        <p:spPr>
+          <a:xfrm>
+            <a:off x="7654366" y="128016"/>
+            <a:ext cx="201168" cy="201168"/>
+          </a:xfrm>
+          <a:prstGeom prst="rect">
+            <a:avLst/>
+          </a:prstGeom>
+        </p:spPr>
+      </p:pic>
+      <p:sp>
+        <p:nvSpPr>
+          <p:cNvPr id="7" name="Text 3"/>
+          <p:cNvSpPr txBox="1"/>
+          <p:nvPr/>
+        </p:nvSpPr>
+        <p:spPr>
+          <a:xfrm>
+            <a:off x="7910398" y="91440"/>
+            <a:ext cx="3696081" cy="274320"/>
+          </a:xfrm>
+          <a:prstGeom prst="rect">
+            <a:avLst/>
+          </a:prstGeom>
+          <a:noFill/>
+          <a:ln/>
+        </p:spPr>
+        <p:txBody>
+          <a:bodyPr wrap="square" lIns="0" tIns="0" rIns="0" bIns="0" rtlCol="0" anchor="ctr"/>
+          <a:lstStyle/>
+          <a:p>
+            <a:pPr indent="0" marL="0">
+              <a:buNone/>
+            </a:pPr>
+            <a:r>
+              <a:rPr lang="en-US" sz="1100" b="1" dirty="0">
+                <a:solidFill>
+                  <a:srgbClr val="075985"/>
+                </a:solidFill>
+                <a:latin typeface="Calibri" pitchFamily="34" charset="0"/>
+                <a:ea typeface="Calibri" pitchFamily="34" charset="-122"/>
+                <a:cs typeface="Calibri" pitchFamily="34" charset="-120"/>
+              </a:rPr>
+              <a:t>DA COMPRENDERE OGGI</a:t>
+            </a:r>
+            <a:pPr indent="0" marL="0">
+              <a:buNone/>
+            </a:pPr>
+            <a:r>
+              <a:rPr lang="en-US" sz="1100" dirty="0">
+                <a:solidFill>
+                  <a:srgbClr val="075985"/>
+                </a:solidFill>
+                <a:latin typeface="Calibri" pitchFamily="34" charset="0"/>
+                <a:ea typeface="Calibri" pitchFamily="34" charset="-122"/>
+                <a:cs typeface="Calibri" pitchFamily="34" charset="-120"/>
+              </a:rPr>
+              <a:t> · la virgola mobile IEEE 754</a:t>
+            </a:r>
+            <a:endParaRPr lang="en-US" sz="1100" dirty="0"/>
+          </a:p>
+        </p:txBody>
+      </p:sp>
       <p:sp>
         <p:nvSpPr>
           <p:cNvPr id="25" name="Slide Number Placeholder 0"/>
@@ -10350,6 +11289,133 @@
           </a:graphicData>
         </a:graphic>
       </p:graphicFrame>
+      <p:sp>
+        <p:nvSpPr>
+          <p:cNvPr id="4" name="Shape 1"/>
+          <p:cNvSpPr/>
+          <p:nvPr/>
+        </p:nvSpPr>
+        <p:spPr>
+          <a:xfrm>
+            <a:off x="7526350" y="91440"/>
+            <a:ext cx="4116705" cy="274320"/>
+          </a:xfrm>
+          <a:prstGeom prst="rect">
+            <a:avLst/>
+          </a:prstGeom>
+          <a:solidFill>
+            <a:srgbClr val="E0F2FE"/>
+          </a:solidFill>
+          <a:ln w="12700">
+            <a:solidFill>
+              <a:srgbClr val="0369A1"/>
+            </a:solidFill>
+            <a:prstDash val="solid"/>
+          </a:ln>
+        </p:spPr>
+      </p:sp>
+      <p:sp>
+        <p:nvSpPr>
+          <p:cNvPr id="5" name="Shape 2"/>
+          <p:cNvSpPr/>
+          <p:nvPr/>
+        </p:nvSpPr>
+        <p:spPr>
+          <a:xfrm>
+            <a:off x="7526350" y="91440"/>
+            <a:ext cx="73152" cy="274320"/>
+          </a:xfrm>
+          <a:prstGeom prst="rect">
+            <a:avLst/>
+          </a:prstGeom>
+          <a:solidFill>
+            <a:srgbClr val="0369A1"/>
+          </a:solidFill>
+          <a:ln w="12700">
+            <a:solidFill>
+              <a:srgbClr val="0369A1"/>
+            </a:solidFill>
+            <a:prstDash val="solid"/>
+          </a:ln>
+        </p:spPr>
+      </p:sp>
+      <p:pic>
+        <p:nvPicPr>
+          <p:cNvPr id="6" name="Image 0" descr="preencoded.png">    </p:cNvPr>
+          <p:cNvPicPr>
+            <a:picLocks noChangeAspect="1"/>
+          </p:cNvPicPr>
+          <p:nvPr/>
+        </p:nvPicPr>
+        <p:blipFill>
+          <a:blip r:embed="rId1"/>
+          <a:stretch>
+            <a:fillRect/>
+          </a:stretch>
+        </p:blipFill>
+        <p:spPr>
+          <a:xfrm>
+            <a:off x="7654366" y="128016"/>
+            <a:ext cx="201168" cy="201168"/>
+          </a:xfrm>
+          <a:prstGeom prst="rect">
+            <a:avLst/>
+          </a:prstGeom>
+        </p:spPr>
+      </p:pic>
+      <p:sp>
+        <p:nvSpPr>
+          <p:cNvPr id="7" name="Text 3"/>
+          <p:cNvSpPr txBox="1"/>
+          <p:nvPr/>
+        </p:nvSpPr>
+        <p:spPr>
+          <a:xfrm>
+            <a:off x="7910398" y="91440"/>
+            <a:ext cx="3696081" cy="274320"/>
+          </a:xfrm>
+          <a:prstGeom prst="rect">
+            <a:avLst/>
+          </a:prstGeom>
+          <a:noFill/>
+          <a:ln/>
+        </p:spPr>
+        <p:txBody>
+          <a:bodyPr wrap="square" lIns="0" tIns="0" rIns="0" bIns="0" rtlCol="0" anchor="ctr"/>
+          <a:lstStyle/>
+          <a:p>
+            <a:pPr indent="0" marL="0">
+              <a:buNone/>
+            </a:pPr>
+            <a:r>
+              <a:rPr lang="en-US" sz="1100" b="1" dirty="0">
+                <a:solidFill>
+                  <a:srgbClr val="075985"/>
+                </a:solidFill>
+                <a:latin typeface="Calibri" pitchFamily="34" charset="0"/>
+                <a:ea typeface="Calibri" pitchFamily="34" charset="-122"/>
+                <a:cs typeface="Calibri" pitchFamily="34" charset="-120"/>
+              </a:rPr>
+              <a:t>DA COMPRENDERE OGGI</a:t>
+            </a:r>
+            <a:pPr indent="0" marL="0">
+              <a:buNone/>
+            </a:pPr>
+            <a:r>
+              <a:rPr lang="en-US" sz="1100" dirty="0">
+                <a:solidFill>
+                  <a:srgbClr val="075985"/>
+                </a:solidFill>
+                <a:latin typeface="Calibri" pitchFamily="34" charset="0"/>
+                <a:ea typeface="Calibri" pitchFamily="34" charset="-122"/>
+                <a:cs typeface="Calibri" pitchFamily="34" charset="-120"/>
+              </a:rPr>
+              <a:t> · la virgola mobile IEEE 754</a:t>
+            </a:r>
+            <a:endParaRPr lang="en-US" sz="1100" dirty="0"/>
+          </a:p>
+        </p:txBody>
+      </p:sp>
       <p:sp>
         <p:nvSpPr>
           <p:cNvPr id="25" name="Slide Number Placeholder 0"/>
@@ -10826,6 +11892,133 @@
       </p:sp>
       <p:sp>
         <p:nvSpPr>
+          <p:cNvPr id="9" name="Shape 7"/>
+          <p:cNvSpPr/>
+          <p:nvPr/>
+        </p:nvSpPr>
+        <p:spPr>
+          <a:xfrm>
+            <a:off x="7526350" y="91440"/>
+            <a:ext cx="4116705" cy="274320"/>
+          </a:xfrm>
+          <a:prstGeom prst="rect">
+            <a:avLst/>
+          </a:prstGeom>
+          <a:solidFill>
+            <a:srgbClr val="E0F2FE"/>
+          </a:solidFill>
+          <a:ln w="12700">
+            <a:solidFill>
+              <a:srgbClr val="0369A1"/>
+            </a:solidFill>
+            <a:prstDash val="solid"/>
+          </a:ln>
+        </p:spPr>
+      </p:sp>
+      <p:sp>
+        <p:nvSpPr>
+          <p:cNvPr id="10" name="Shape 8"/>
+          <p:cNvSpPr/>
+          <p:nvPr/>
+        </p:nvSpPr>
+        <p:spPr>
+          <a:xfrm>
+            <a:off x="7526350" y="91440"/>
+            <a:ext cx="73152" cy="274320"/>
+          </a:xfrm>
+          <a:prstGeom prst="rect">
+            <a:avLst/>
+          </a:prstGeom>
+          <a:solidFill>
+            <a:srgbClr val="0369A1"/>
+          </a:solidFill>
+          <a:ln w="12700">
+            <a:solidFill>
+              <a:srgbClr val="0369A1"/>
+            </a:solidFill>
+            <a:prstDash val="solid"/>
+          </a:ln>
+        </p:spPr>
+      </p:sp>
+      <p:pic>
+        <p:nvPicPr>
+          <p:cNvPr id="11" name="Image 0" descr="preencoded.png">    </p:cNvPr>
+          <p:cNvPicPr>
+            <a:picLocks noChangeAspect="1"/>
+          </p:cNvPicPr>
+          <p:nvPr/>
+        </p:nvPicPr>
+        <p:blipFill>
+          <a:blip r:embed="rId1"/>
+          <a:stretch>
+            <a:fillRect/>
+          </a:stretch>
+        </p:blipFill>
+        <p:spPr>
+          <a:xfrm>
+            <a:off x="7654366" y="128016"/>
+            <a:ext cx="201168" cy="201168"/>
+          </a:xfrm>
+          <a:prstGeom prst="rect">
+            <a:avLst/>
+          </a:prstGeom>
+        </p:spPr>
+      </p:pic>
+      <p:sp>
+        <p:nvSpPr>
+          <p:cNvPr id="12" name="Text 9"/>
+          <p:cNvSpPr txBox="1"/>
+          <p:nvPr/>
+        </p:nvSpPr>
+        <p:spPr>
+          <a:xfrm>
+            <a:off x="7910398" y="91440"/>
+            <a:ext cx="3696081" cy="274320"/>
+          </a:xfrm>
+          <a:prstGeom prst="rect">
+            <a:avLst/>
+          </a:prstGeom>
+          <a:noFill/>
+          <a:ln/>
+        </p:spPr>
+        <p:txBody>
+          <a:bodyPr wrap="square" lIns="0" tIns="0" rIns="0" bIns="0" rtlCol="0" anchor="ctr"/>
+          <a:lstStyle/>
+          <a:p>
+            <a:pPr indent="0" marL="0">
+              <a:buNone/>
+            </a:pPr>
+            <a:r>
+              <a:rPr lang="en-US" sz="1100" b="1" dirty="0">
+                <a:solidFill>
+                  <a:srgbClr val="075985"/>
+                </a:solidFill>
+                <a:latin typeface="Calibri" pitchFamily="34" charset="0"/>
+                <a:ea typeface="Calibri" pitchFamily="34" charset="-122"/>
+                <a:cs typeface="Calibri" pitchFamily="34" charset="-120"/>
+              </a:rPr>
+              <a:t>DA COMPRENDERE OGGI</a:t>
+            </a:r>
+            <a:pPr indent="0" marL="0">
+              <a:buNone/>
+            </a:pPr>
+            <a:r>
+              <a:rPr lang="en-US" sz="1100" dirty="0">
+                <a:solidFill>
+                  <a:srgbClr val="075985"/>
+                </a:solidFill>
+                <a:latin typeface="Calibri" pitchFamily="34" charset="0"/>
+                <a:ea typeface="Calibri" pitchFamily="34" charset="-122"/>
+                <a:cs typeface="Calibri" pitchFamily="34" charset="-120"/>
+              </a:rPr>
+              <a:t> · la virgola mobile IEEE 754</a:t>
+            </a:r>
+            <a:endParaRPr lang="en-US" sz="1100" dirty="0"/>
+          </a:p>
+        </p:txBody>
+      </p:sp>
+      <p:sp>
+        <p:nvSpPr>
           <p:cNvPr id="25" name="Slide Number Placeholder 0"/>
           <p:cNvSpPr>
             <a:spLocks noGrp="1"/>
@@ -12888,6 +14081,133 @@
           </a:graphicData>
         </a:graphic>
       </p:graphicFrame>
+      <p:sp>
+        <p:nvSpPr>
+          <p:cNvPr id="4" name="Shape 1"/>
+          <p:cNvSpPr/>
+          <p:nvPr/>
+        </p:nvSpPr>
+        <p:spPr>
+          <a:xfrm>
+            <a:off x="8182940" y="91440"/>
+            <a:ext cx="3460115" cy="274320"/>
+          </a:xfrm>
+          <a:prstGeom prst="rect">
+            <a:avLst/>
+          </a:prstGeom>
+          <a:solidFill>
+            <a:srgbClr val="E0F2FE"/>
+          </a:solidFill>
+          <a:ln w="12700">
+            <a:solidFill>
+              <a:srgbClr val="0369A1"/>
+            </a:solidFill>
+            <a:prstDash val="solid"/>
+          </a:ln>
+        </p:spPr>
+      </p:sp>
+      <p:sp>
+        <p:nvSpPr>
+          <p:cNvPr id="5" name="Shape 2"/>
+          <p:cNvSpPr/>
+          <p:nvPr/>
+        </p:nvSpPr>
+        <p:spPr>
+          <a:xfrm>
+            <a:off x="8182940" y="91440"/>
+            <a:ext cx="73152" cy="274320"/>
+          </a:xfrm>
+          <a:prstGeom prst="rect">
+            <a:avLst/>
+          </a:prstGeom>
+          <a:solidFill>
+            <a:srgbClr val="0369A1"/>
+          </a:solidFill>
+          <a:ln w="12700">
+            <a:solidFill>
+              <a:srgbClr val="0369A1"/>
+            </a:solidFill>
+            <a:prstDash val="solid"/>
+          </a:ln>
+        </p:spPr>
+      </p:sp>
+      <p:pic>
+        <p:nvPicPr>
+          <p:cNvPr id="6" name="Image 0" descr="preencoded.png">    </p:cNvPr>
+          <p:cNvPicPr>
+            <a:picLocks noChangeAspect="1"/>
+          </p:cNvPicPr>
+          <p:nvPr/>
+        </p:nvPicPr>
+        <p:blipFill>
+          <a:blip r:embed="rId1"/>
+          <a:stretch>
+            <a:fillRect/>
+          </a:stretch>
+        </p:blipFill>
+        <p:spPr>
+          <a:xfrm>
+            <a:off x="8310956" y="128016"/>
+            <a:ext cx="201168" cy="201168"/>
+          </a:xfrm>
+          <a:prstGeom prst="rect">
+            <a:avLst/>
+          </a:prstGeom>
+        </p:spPr>
+      </p:pic>
+      <p:sp>
+        <p:nvSpPr>
+          <p:cNvPr id="7" name="Text 3"/>
+          <p:cNvSpPr txBox="1"/>
+          <p:nvPr/>
+        </p:nvSpPr>
+        <p:spPr>
+          <a:xfrm>
+            <a:off x="8566988" y="91440"/>
+            <a:ext cx="3039491" cy="274320"/>
+          </a:xfrm>
+          <a:prstGeom prst="rect">
+            <a:avLst/>
+          </a:prstGeom>
+          <a:noFill/>
+          <a:ln/>
+        </p:spPr>
+        <p:txBody>
+          <a:bodyPr wrap="square" lIns="0" tIns="0" rIns="0" bIns="0" rtlCol="0" anchor="ctr"/>
+          <a:lstStyle/>
+          <a:p>
+            <a:pPr indent="0" marL="0">
+              <a:buNone/>
+            </a:pPr>
+            <a:r>
+              <a:rPr lang="en-US" sz="1100" b="1" dirty="0">
+                <a:solidFill>
+                  <a:srgbClr val="075985"/>
+                </a:solidFill>
+                <a:latin typeface="Calibri" pitchFamily="34" charset="0"/>
+                <a:ea typeface="Calibri" pitchFamily="34" charset="-122"/>
+                <a:cs typeface="Calibri" pitchFamily="34" charset="-120"/>
+              </a:rPr>
+              <a:t>DA COMPRENDERE OGGI</a:t>
+            </a:r>
+            <a:pPr indent="0" marL="0">
+              <a:buNone/>
+            </a:pPr>
+            <a:r>
+              <a:rPr lang="en-US" sz="1100" dirty="0">
+                <a:solidFill>
+                  <a:srgbClr val="075985"/>
+                </a:solidFill>
+                <a:latin typeface="Calibri" pitchFamily="34" charset="0"/>
+                <a:ea typeface="Calibri" pitchFamily="34" charset="-122"/>
+                <a:cs typeface="Calibri" pitchFamily="34" charset="-120"/>
+              </a:rPr>
+              <a:t> · il nome RV32IMAC</a:t>
+            </a:r>
+            <a:endParaRPr lang="en-US" sz="1100" dirty="0"/>
+          </a:p>
+        </p:txBody>
+      </p:sp>
       <p:sp>
         <p:nvSpPr>
           <p:cNvPr id="25" name="Slide Number Placeholder 0"/>
@@ -19132,6 +20452,133 @@
       </p:sp>
       <p:sp>
         <p:nvSpPr>
+          <p:cNvPr id="16" name="Shape 14"/>
+          <p:cNvSpPr/>
+          <p:nvPr/>
+        </p:nvSpPr>
+        <p:spPr>
+          <a:xfrm>
+            <a:off x="7263714" y="91440"/>
+            <a:ext cx="4379341" cy="274320"/>
+          </a:xfrm>
+          <a:prstGeom prst="rect">
+            <a:avLst/>
+          </a:prstGeom>
+          <a:solidFill>
+            <a:srgbClr val="E0F2FE"/>
+          </a:solidFill>
+          <a:ln w="12700">
+            <a:solidFill>
+              <a:srgbClr val="0369A1"/>
+            </a:solidFill>
+            <a:prstDash val="solid"/>
+          </a:ln>
+        </p:spPr>
+      </p:sp>
+      <p:sp>
+        <p:nvSpPr>
+          <p:cNvPr id="17" name="Shape 15"/>
+          <p:cNvSpPr/>
+          <p:nvPr/>
+        </p:nvSpPr>
+        <p:spPr>
+          <a:xfrm>
+            <a:off x="7263714" y="91440"/>
+            <a:ext cx="73152" cy="274320"/>
+          </a:xfrm>
+          <a:prstGeom prst="rect">
+            <a:avLst/>
+          </a:prstGeom>
+          <a:solidFill>
+            <a:srgbClr val="0369A1"/>
+          </a:solidFill>
+          <a:ln w="12700">
+            <a:solidFill>
+              <a:srgbClr val="0369A1"/>
+            </a:solidFill>
+            <a:prstDash val="solid"/>
+          </a:ln>
+        </p:spPr>
+      </p:sp>
+      <p:pic>
+        <p:nvPicPr>
+          <p:cNvPr id="18" name="Image 0" descr="preencoded.png">    </p:cNvPr>
+          <p:cNvPicPr>
+            <a:picLocks noChangeAspect="1"/>
+          </p:cNvPicPr>
+          <p:nvPr/>
+        </p:nvPicPr>
+        <p:blipFill>
+          <a:blip r:embed="rId1"/>
+          <a:stretch>
+            <a:fillRect/>
+          </a:stretch>
+        </p:blipFill>
+        <p:spPr>
+          <a:xfrm>
+            <a:off x="7391730" y="128016"/>
+            <a:ext cx="201168" cy="201168"/>
+          </a:xfrm>
+          <a:prstGeom prst="rect">
+            <a:avLst/>
+          </a:prstGeom>
+        </p:spPr>
+      </p:pic>
+      <p:sp>
+        <p:nvSpPr>
+          <p:cNvPr id="19" name="Text 16"/>
+          <p:cNvSpPr txBox="1"/>
+          <p:nvPr/>
+        </p:nvSpPr>
+        <p:spPr>
+          <a:xfrm>
+            <a:off x="7647762" y="91440"/>
+            <a:ext cx="3958717" cy="274320"/>
+          </a:xfrm>
+          <a:prstGeom prst="rect">
+            <a:avLst/>
+          </a:prstGeom>
+          <a:noFill/>
+          <a:ln/>
+        </p:spPr>
+        <p:txBody>
+          <a:bodyPr wrap="square" lIns="0" tIns="0" rIns="0" bIns="0" rtlCol="0" anchor="ctr"/>
+          <a:lstStyle/>
+          <a:p>
+            <a:pPr indent="0" marL="0">
+              <a:buNone/>
+            </a:pPr>
+            <a:r>
+              <a:rPr lang="en-US" sz="1100" b="1" dirty="0">
+                <a:solidFill>
+                  <a:srgbClr val="075985"/>
+                </a:solidFill>
+                <a:latin typeface="Calibri" pitchFamily="34" charset="0"/>
+                <a:ea typeface="Calibri" pitchFamily="34" charset="-122"/>
+                <a:cs typeface="Calibri" pitchFamily="34" charset="-120"/>
+              </a:rPr>
+              <a:t>DA COMPRENDERE OGGI</a:t>
+            </a:r>
+            <a:pPr indent="0" marL="0">
+              <a:buNone/>
+            </a:pPr>
+            <a:r>
+              <a:rPr lang="en-US" sz="1100" dirty="0">
+                <a:solidFill>
+                  <a:srgbClr val="075985"/>
+                </a:solidFill>
+                <a:latin typeface="Calibri" pitchFamily="34" charset="0"/>
+                <a:ea typeface="Calibri" pitchFamily="34" charset="-122"/>
+                <a:cs typeface="Calibri" pitchFamily="34" charset="-120"/>
+              </a:rPr>
+              <a:t> · complemento a uno ed eccesso k</a:t>
+            </a:r>
+            <a:endParaRPr lang="en-US" sz="1100" dirty="0"/>
+          </a:p>
+        </p:txBody>
+      </p:sp>
+      <p:sp>
+        <p:nvSpPr>
           <p:cNvPr id="25" name="Slide Number Placeholder 0"/>
           <p:cNvSpPr>
             <a:spLocks noGrp="1"/>
@@ -20246,6 +21693,133 @@
       </p:sp>
       <p:sp>
         <p:nvSpPr>
+          <p:cNvPr id="24" name="Shape 22"/>
+          <p:cNvSpPr/>
+          <p:nvPr/>
+        </p:nvSpPr>
+        <p:spPr>
+          <a:xfrm>
+            <a:off x="7263714" y="91440"/>
+            <a:ext cx="4379341" cy="274320"/>
+          </a:xfrm>
+          <a:prstGeom prst="rect">
+            <a:avLst/>
+          </a:prstGeom>
+          <a:solidFill>
+            <a:srgbClr val="E0F2FE"/>
+          </a:solidFill>
+          <a:ln w="12700">
+            <a:solidFill>
+              <a:srgbClr val="0369A1"/>
+            </a:solidFill>
+            <a:prstDash val="solid"/>
+          </a:ln>
+        </p:spPr>
+      </p:sp>
+      <p:sp>
+        <p:nvSpPr>
+          <p:cNvPr id="25" name="Shape 23"/>
+          <p:cNvSpPr/>
+          <p:nvPr/>
+        </p:nvSpPr>
+        <p:spPr>
+          <a:xfrm>
+            <a:off x="7263714" y="91440"/>
+            <a:ext cx="73152" cy="274320"/>
+          </a:xfrm>
+          <a:prstGeom prst="rect">
+            <a:avLst/>
+          </a:prstGeom>
+          <a:solidFill>
+            <a:srgbClr val="0369A1"/>
+          </a:solidFill>
+          <a:ln w="12700">
+            <a:solidFill>
+              <a:srgbClr val="0369A1"/>
+            </a:solidFill>
+            <a:prstDash val="solid"/>
+          </a:ln>
+        </p:spPr>
+      </p:sp>
+      <p:pic>
+        <p:nvPicPr>
+          <p:cNvPr id="26" name="Image 0" descr="preencoded.png">    </p:cNvPr>
+          <p:cNvPicPr>
+            <a:picLocks noChangeAspect="1"/>
+          </p:cNvPicPr>
+          <p:nvPr/>
+        </p:nvPicPr>
+        <p:blipFill>
+          <a:blip r:embed="rId1"/>
+          <a:stretch>
+            <a:fillRect/>
+          </a:stretch>
+        </p:blipFill>
+        <p:spPr>
+          <a:xfrm>
+            <a:off x="7391730" y="128016"/>
+            <a:ext cx="201168" cy="201168"/>
+          </a:xfrm>
+          <a:prstGeom prst="rect">
+            <a:avLst/>
+          </a:prstGeom>
+        </p:spPr>
+      </p:pic>
+      <p:sp>
+        <p:nvSpPr>
+          <p:cNvPr id="27" name="Text 24"/>
+          <p:cNvSpPr txBox="1"/>
+          <p:nvPr/>
+        </p:nvSpPr>
+        <p:spPr>
+          <a:xfrm>
+            <a:off x="7647762" y="91440"/>
+            <a:ext cx="3958717" cy="274320"/>
+          </a:xfrm>
+          <a:prstGeom prst="rect">
+            <a:avLst/>
+          </a:prstGeom>
+          <a:noFill/>
+          <a:ln/>
+        </p:spPr>
+        <p:txBody>
+          <a:bodyPr wrap="square" lIns="0" tIns="0" rIns="0" bIns="0" rtlCol="0" anchor="ctr"/>
+          <a:lstStyle/>
+          <a:p>
+            <a:pPr indent="0" marL="0">
+              <a:buNone/>
+            </a:pPr>
+            <a:r>
+              <a:rPr lang="en-US" sz="1100" b="1" dirty="0">
+                <a:solidFill>
+                  <a:srgbClr val="075985"/>
+                </a:solidFill>
+                <a:latin typeface="Calibri" pitchFamily="34" charset="0"/>
+                <a:ea typeface="Calibri" pitchFamily="34" charset="-122"/>
+                <a:cs typeface="Calibri" pitchFamily="34" charset="-120"/>
+              </a:rPr>
+              <a:t>DA COMPRENDERE OGGI</a:t>
+            </a:r>
+            <a:pPr indent="0" marL="0">
+              <a:buNone/>
+            </a:pPr>
+            <a:r>
+              <a:rPr lang="en-US" sz="1100" dirty="0">
+                <a:solidFill>
+                  <a:srgbClr val="075985"/>
+                </a:solidFill>
+                <a:latin typeface="Calibri" pitchFamily="34" charset="0"/>
+                <a:ea typeface="Calibri" pitchFamily="34" charset="-122"/>
+                <a:cs typeface="Calibri" pitchFamily="34" charset="-120"/>
+              </a:rPr>
+              <a:t> · complemento a uno ed eccesso k</a:t>
+            </a:r>
+            <a:endParaRPr lang="en-US" sz="1100" dirty="0"/>
+          </a:p>
+        </p:txBody>
+      </p:sp>
+      <p:sp>
+        <p:nvSpPr>
           <p:cNvPr id="25" name="Slide Number Placeholder 0"/>
           <p:cNvSpPr>
             <a:spLocks noGrp="1"/>
@@ -20795,6 +22369,133 @@
               <a:t>su quattro bit con k = 8: la configurazione 0000 significa -8, 1000 significa 0, 1111 significa +7</a:t>
             </a:r>
             <a:endParaRPr lang="en-US" sz="1900" dirty="0"/>
+          </a:p>
+        </p:txBody>
+      </p:sp>
+      <p:sp>
+        <p:nvSpPr>
+          <p:cNvPr id="16" name="Shape 14"/>
+          <p:cNvSpPr/>
+          <p:nvPr/>
+        </p:nvSpPr>
+        <p:spPr>
+          <a:xfrm>
+            <a:off x="7263714" y="91440"/>
+            <a:ext cx="4379341" cy="274320"/>
+          </a:xfrm>
+          <a:prstGeom prst="rect">
+            <a:avLst/>
+          </a:prstGeom>
+          <a:solidFill>
+            <a:srgbClr val="E0F2FE"/>
+          </a:solidFill>
+          <a:ln w="12700">
+            <a:solidFill>
+              <a:srgbClr val="0369A1"/>
+            </a:solidFill>
+            <a:prstDash val="solid"/>
+          </a:ln>
+        </p:spPr>
+      </p:sp>
+      <p:sp>
+        <p:nvSpPr>
+          <p:cNvPr id="17" name="Shape 15"/>
+          <p:cNvSpPr/>
+          <p:nvPr/>
+        </p:nvSpPr>
+        <p:spPr>
+          <a:xfrm>
+            <a:off x="7263714" y="91440"/>
+            <a:ext cx="73152" cy="274320"/>
+          </a:xfrm>
+          <a:prstGeom prst="rect">
+            <a:avLst/>
+          </a:prstGeom>
+          <a:solidFill>
+            <a:srgbClr val="0369A1"/>
+          </a:solidFill>
+          <a:ln w="12700">
+            <a:solidFill>
+              <a:srgbClr val="0369A1"/>
+            </a:solidFill>
+            <a:prstDash val="solid"/>
+          </a:ln>
+        </p:spPr>
+      </p:sp>
+      <p:pic>
+        <p:nvPicPr>
+          <p:cNvPr id="18" name="Image 0" descr="preencoded.png">    </p:cNvPr>
+          <p:cNvPicPr>
+            <a:picLocks noChangeAspect="1"/>
+          </p:cNvPicPr>
+          <p:nvPr/>
+        </p:nvPicPr>
+        <p:blipFill>
+          <a:blip r:embed="rId1"/>
+          <a:stretch>
+            <a:fillRect/>
+          </a:stretch>
+        </p:blipFill>
+        <p:spPr>
+          <a:xfrm>
+            <a:off x="7391730" y="128016"/>
+            <a:ext cx="201168" cy="201168"/>
+          </a:xfrm>
+          <a:prstGeom prst="rect">
+            <a:avLst/>
+          </a:prstGeom>
+        </p:spPr>
+      </p:pic>
+      <p:sp>
+        <p:nvSpPr>
+          <p:cNvPr id="19" name="Text 16"/>
+          <p:cNvSpPr txBox="1"/>
+          <p:nvPr/>
+        </p:nvSpPr>
+        <p:spPr>
+          <a:xfrm>
+            <a:off x="7647762" y="91440"/>
+            <a:ext cx="3958717" cy="274320"/>
+          </a:xfrm>
+          <a:prstGeom prst="rect">
+            <a:avLst/>
+          </a:prstGeom>
+          <a:noFill/>
+          <a:ln/>
+        </p:spPr>
+        <p:txBody>
+          <a:bodyPr wrap="square" lIns="0" tIns="0" rIns="0" bIns="0" rtlCol="0" anchor="ctr"/>
+          <a:lstStyle/>
+          <a:p>
+            <a:pPr indent="0" marL="0">
+              <a:buNone/>
+            </a:pPr>
+            <a:r>
+              <a:rPr lang="en-US" sz="1100" b="1" dirty="0">
+                <a:solidFill>
+                  <a:srgbClr val="075985"/>
+                </a:solidFill>
+                <a:latin typeface="Calibri" pitchFamily="34" charset="0"/>
+                <a:ea typeface="Calibri" pitchFamily="34" charset="-122"/>
+                <a:cs typeface="Calibri" pitchFamily="34" charset="-120"/>
+              </a:rPr>
+              <a:t>DA COMPRENDERE OGGI</a:t>
+            </a:r>
+            <a:pPr indent="0" marL="0">
+              <a:buNone/>
+            </a:pPr>
+            <a:r>
+              <a:rPr lang="en-US" sz="1100" dirty="0">
+                <a:solidFill>
+                  <a:srgbClr val="075985"/>
+                </a:solidFill>
+                <a:latin typeface="Calibri" pitchFamily="34" charset="0"/>
+                <a:ea typeface="Calibri" pitchFamily="34" charset="-122"/>
+                <a:cs typeface="Calibri" pitchFamily="34" charset="-120"/>
+              </a:rPr>
+              <a:t> · complemento a uno ed eccesso k</a:t>
+            </a:r>
+            <a:endParaRPr lang="en-US" sz="1100" dirty="0"/>
           </a:p>
         </p:txBody>
       </p:sp>
@@ -28563,6 +30264,133 @@
       </p:sp>
       <p:sp>
         <p:nvSpPr>
+          <p:cNvPr id="11" name="Shape 7"/>
+          <p:cNvSpPr/>
+          <p:nvPr/>
+        </p:nvSpPr>
+        <p:spPr>
+          <a:xfrm>
+            <a:off x="7263714" y="91440"/>
+            <a:ext cx="4379341" cy="274320"/>
+          </a:xfrm>
+          <a:prstGeom prst="rect">
+            <a:avLst/>
+          </a:prstGeom>
+          <a:solidFill>
+            <a:srgbClr val="E0F2FE"/>
+          </a:solidFill>
+          <a:ln w="12700">
+            <a:solidFill>
+              <a:srgbClr val="0369A1"/>
+            </a:solidFill>
+            <a:prstDash val="solid"/>
+          </a:ln>
+        </p:spPr>
+      </p:sp>
+      <p:sp>
+        <p:nvSpPr>
+          <p:cNvPr id="12" name="Shape 8"/>
+          <p:cNvSpPr/>
+          <p:nvPr/>
+        </p:nvSpPr>
+        <p:spPr>
+          <a:xfrm>
+            <a:off x="7263714" y="91440"/>
+            <a:ext cx="73152" cy="274320"/>
+          </a:xfrm>
+          <a:prstGeom prst="rect">
+            <a:avLst/>
+          </a:prstGeom>
+          <a:solidFill>
+            <a:srgbClr val="0369A1"/>
+          </a:solidFill>
+          <a:ln w="12700">
+            <a:solidFill>
+              <a:srgbClr val="0369A1"/>
+            </a:solidFill>
+            <a:prstDash val="solid"/>
+          </a:ln>
+        </p:spPr>
+      </p:sp>
+      <p:pic>
+        <p:nvPicPr>
+          <p:cNvPr id="13" name="Image 0" descr="preencoded.png">    </p:cNvPr>
+          <p:cNvPicPr>
+            <a:picLocks noChangeAspect="1"/>
+          </p:cNvPicPr>
+          <p:nvPr/>
+        </p:nvPicPr>
+        <p:blipFill>
+          <a:blip r:embed="rId1"/>
+          <a:stretch>
+            <a:fillRect/>
+          </a:stretch>
+        </p:blipFill>
+        <p:spPr>
+          <a:xfrm>
+            <a:off x="7391730" y="128016"/>
+            <a:ext cx="201168" cy="201168"/>
+          </a:xfrm>
+          <a:prstGeom prst="rect">
+            <a:avLst/>
+          </a:prstGeom>
+        </p:spPr>
+      </p:pic>
+      <p:sp>
+        <p:nvSpPr>
+          <p:cNvPr id="14" name="Text 9"/>
+          <p:cNvSpPr txBox="1"/>
+          <p:nvPr/>
+        </p:nvSpPr>
+        <p:spPr>
+          <a:xfrm>
+            <a:off x="7647762" y="91440"/>
+            <a:ext cx="3958717" cy="274320"/>
+          </a:xfrm>
+          <a:prstGeom prst="rect">
+            <a:avLst/>
+          </a:prstGeom>
+          <a:noFill/>
+          <a:ln/>
+        </p:spPr>
+        <p:txBody>
+          <a:bodyPr wrap="square" lIns="0" tIns="0" rIns="0" bIns="0" rtlCol="0" anchor="ctr"/>
+          <a:lstStyle/>
+          <a:p>
+            <a:pPr indent="0" marL="0">
+              <a:buNone/>
+            </a:pPr>
+            <a:r>
+              <a:rPr lang="en-US" sz="1100" b="1" dirty="0">
+                <a:solidFill>
+                  <a:srgbClr val="075985"/>
+                </a:solidFill>
+                <a:latin typeface="Calibri" pitchFamily="34" charset="0"/>
+                <a:ea typeface="Calibri" pitchFamily="34" charset="-122"/>
+                <a:cs typeface="Calibri" pitchFamily="34" charset="-120"/>
+              </a:rPr>
+              <a:t>DA COMPRENDERE OGGI</a:t>
+            </a:r>
+            <a:pPr indent="0" marL="0">
+              <a:buNone/>
+            </a:pPr>
+            <a:r>
+              <a:rPr lang="en-US" sz="1100" dirty="0">
+                <a:solidFill>
+                  <a:srgbClr val="075985"/>
+                </a:solidFill>
+                <a:latin typeface="Calibri" pitchFamily="34" charset="0"/>
+                <a:ea typeface="Calibri" pitchFamily="34" charset="-122"/>
+                <a:cs typeface="Calibri" pitchFamily="34" charset="-120"/>
+              </a:rPr>
+              <a:t> · complemento a uno ed eccesso k</a:t>
+            </a:r>
+            <a:endParaRPr lang="en-US" sz="1100" dirty="0"/>
+          </a:p>
+        </p:txBody>
+      </p:sp>
+      <p:sp>
+        <p:nvSpPr>
           <p:cNvPr id="25" name="Slide Number Placeholder 0"/>
           <p:cNvSpPr>
             <a:spLocks noGrp="1"/>
@@ -29112,6 +30940,133 @@
               <a:t>si memorizza il numero moltiplicato per una potenza di due; scorrendo a destra di f bit si riottiene la parte intera</a:t>
             </a:r>
             <a:endParaRPr lang="en-US" sz="1900" dirty="0"/>
+          </a:p>
+        </p:txBody>
+      </p:sp>
+      <p:sp>
+        <p:nvSpPr>
+          <p:cNvPr id="16" name="Shape 14"/>
+          <p:cNvSpPr/>
+          <p:nvPr/>
+        </p:nvSpPr>
+        <p:spPr>
+          <a:xfrm>
+            <a:off x="8182940" y="91440"/>
+            <a:ext cx="3460115" cy="274320"/>
+          </a:xfrm>
+          <a:prstGeom prst="rect">
+            <a:avLst/>
+          </a:prstGeom>
+          <a:solidFill>
+            <a:srgbClr val="E0F2FE"/>
+          </a:solidFill>
+          <a:ln w="12700">
+            <a:solidFill>
+              <a:srgbClr val="0369A1"/>
+            </a:solidFill>
+            <a:prstDash val="solid"/>
+          </a:ln>
+        </p:spPr>
+      </p:sp>
+      <p:sp>
+        <p:nvSpPr>
+          <p:cNvPr id="17" name="Shape 15"/>
+          <p:cNvSpPr/>
+          <p:nvPr/>
+        </p:nvSpPr>
+        <p:spPr>
+          <a:xfrm>
+            <a:off x="8182940" y="91440"/>
+            <a:ext cx="73152" cy="274320"/>
+          </a:xfrm>
+          <a:prstGeom prst="rect">
+            <a:avLst/>
+          </a:prstGeom>
+          <a:solidFill>
+            <a:srgbClr val="0369A1"/>
+          </a:solidFill>
+          <a:ln w="12700">
+            <a:solidFill>
+              <a:srgbClr val="0369A1"/>
+            </a:solidFill>
+            <a:prstDash val="solid"/>
+          </a:ln>
+        </p:spPr>
+      </p:sp>
+      <p:pic>
+        <p:nvPicPr>
+          <p:cNvPr id="18" name="Image 0" descr="preencoded.png">    </p:cNvPr>
+          <p:cNvPicPr>
+            <a:picLocks noChangeAspect="1"/>
+          </p:cNvPicPr>
+          <p:nvPr/>
+        </p:nvPicPr>
+        <p:blipFill>
+          <a:blip r:embed="rId1"/>
+          <a:stretch>
+            <a:fillRect/>
+          </a:stretch>
+        </p:blipFill>
+        <p:spPr>
+          <a:xfrm>
+            <a:off x="8310956" y="128016"/>
+            <a:ext cx="201168" cy="201168"/>
+          </a:xfrm>
+          <a:prstGeom prst="rect">
+            <a:avLst/>
+          </a:prstGeom>
+        </p:spPr>
+      </p:pic>
+      <p:sp>
+        <p:nvSpPr>
+          <p:cNvPr id="19" name="Text 16"/>
+          <p:cNvSpPr txBox="1"/>
+          <p:nvPr/>
+        </p:nvSpPr>
+        <p:spPr>
+          <a:xfrm>
+            <a:off x="8566988" y="91440"/>
+            <a:ext cx="3039491" cy="274320"/>
+          </a:xfrm>
+          <a:prstGeom prst="rect">
+            <a:avLst/>
+          </a:prstGeom>
+          <a:noFill/>
+          <a:ln/>
+        </p:spPr>
+        <p:txBody>
+          <a:bodyPr wrap="square" lIns="0" tIns="0" rIns="0" bIns="0" rtlCol="0" anchor="ctr"/>
+          <a:lstStyle/>
+          <a:p>
+            <a:pPr indent="0" marL="0">
+              <a:buNone/>
+            </a:pPr>
+            <a:r>
+              <a:rPr lang="en-US" sz="1100" b="1" dirty="0">
+                <a:solidFill>
+                  <a:srgbClr val="075985"/>
+                </a:solidFill>
+                <a:latin typeface="Calibri" pitchFamily="34" charset="0"/>
+                <a:ea typeface="Calibri" pitchFamily="34" charset="-122"/>
+                <a:cs typeface="Calibri" pitchFamily="34" charset="-120"/>
+              </a:rPr>
+              <a:t>DA COMPRENDERE OGGI</a:t>
+            </a:r>
+            <a:pPr indent="0" marL="0">
+              <a:buNone/>
+            </a:pPr>
+            <a:r>
+              <a:rPr lang="en-US" sz="1100" dirty="0">
+                <a:solidFill>
+                  <a:srgbClr val="075985"/>
+                </a:solidFill>
+                <a:latin typeface="Calibri" pitchFamily="34" charset="0"/>
+                <a:ea typeface="Calibri" pitchFamily="34" charset="-122"/>
+                <a:cs typeface="Calibri" pitchFamily="34" charset="-120"/>
+              </a:rPr>
+              <a:t> · la virgola fissa</a:t>
+            </a:r>
+            <a:endParaRPr lang="en-US" sz="1100" dirty="0"/>
           </a:p>
         </p:txBody>
       </p:sp>
@@ -29691,6 +31646,133 @@
       </p:sp>
       <p:sp>
         <p:nvSpPr>
+          <p:cNvPr id="16" name="Shape 14"/>
+          <p:cNvSpPr/>
+          <p:nvPr/>
+        </p:nvSpPr>
+        <p:spPr>
+          <a:xfrm>
+            <a:off x="8182940" y="91440"/>
+            <a:ext cx="3460115" cy="274320"/>
+          </a:xfrm>
+          <a:prstGeom prst="rect">
+            <a:avLst/>
+          </a:prstGeom>
+          <a:solidFill>
+            <a:srgbClr val="E0F2FE"/>
+          </a:solidFill>
+          <a:ln w="12700">
+            <a:solidFill>
+              <a:srgbClr val="0369A1"/>
+            </a:solidFill>
+            <a:prstDash val="solid"/>
+          </a:ln>
+        </p:spPr>
+      </p:sp>
+      <p:sp>
+        <p:nvSpPr>
+          <p:cNvPr id="17" name="Shape 15"/>
+          <p:cNvSpPr/>
+          <p:nvPr/>
+        </p:nvSpPr>
+        <p:spPr>
+          <a:xfrm>
+            <a:off x="8182940" y="91440"/>
+            <a:ext cx="73152" cy="274320"/>
+          </a:xfrm>
+          <a:prstGeom prst="rect">
+            <a:avLst/>
+          </a:prstGeom>
+          <a:solidFill>
+            <a:srgbClr val="0369A1"/>
+          </a:solidFill>
+          <a:ln w="12700">
+            <a:solidFill>
+              <a:srgbClr val="0369A1"/>
+            </a:solidFill>
+            <a:prstDash val="solid"/>
+          </a:ln>
+        </p:spPr>
+      </p:sp>
+      <p:pic>
+        <p:nvPicPr>
+          <p:cNvPr id="18" name="Image 0" descr="preencoded.png">    </p:cNvPr>
+          <p:cNvPicPr>
+            <a:picLocks noChangeAspect="1"/>
+          </p:cNvPicPr>
+          <p:nvPr/>
+        </p:nvPicPr>
+        <p:blipFill>
+          <a:blip r:embed="rId1"/>
+          <a:stretch>
+            <a:fillRect/>
+          </a:stretch>
+        </p:blipFill>
+        <p:spPr>
+          <a:xfrm>
+            <a:off x="8310956" y="128016"/>
+            <a:ext cx="201168" cy="201168"/>
+          </a:xfrm>
+          <a:prstGeom prst="rect">
+            <a:avLst/>
+          </a:prstGeom>
+        </p:spPr>
+      </p:pic>
+      <p:sp>
+        <p:nvSpPr>
+          <p:cNvPr id="19" name="Text 16"/>
+          <p:cNvSpPr txBox="1"/>
+          <p:nvPr/>
+        </p:nvSpPr>
+        <p:spPr>
+          <a:xfrm>
+            <a:off x="8566988" y="91440"/>
+            <a:ext cx="3039491" cy="274320"/>
+          </a:xfrm>
+          <a:prstGeom prst="rect">
+            <a:avLst/>
+          </a:prstGeom>
+          <a:noFill/>
+          <a:ln/>
+        </p:spPr>
+        <p:txBody>
+          <a:bodyPr wrap="square" lIns="0" tIns="0" rIns="0" bIns="0" rtlCol="0" anchor="ctr"/>
+          <a:lstStyle/>
+          <a:p>
+            <a:pPr indent="0" marL="0">
+              <a:buNone/>
+            </a:pPr>
+            <a:r>
+              <a:rPr lang="en-US" sz="1100" b="1" dirty="0">
+                <a:solidFill>
+                  <a:srgbClr val="075985"/>
+                </a:solidFill>
+                <a:latin typeface="Calibri" pitchFamily="34" charset="0"/>
+                <a:ea typeface="Calibri" pitchFamily="34" charset="-122"/>
+                <a:cs typeface="Calibri" pitchFamily="34" charset="-120"/>
+              </a:rPr>
+              <a:t>DA COMPRENDERE OGGI</a:t>
+            </a:r>
+            <a:pPr indent="0" marL="0">
+              <a:buNone/>
+            </a:pPr>
+            <a:r>
+              <a:rPr lang="en-US" sz="1100" dirty="0">
+                <a:solidFill>
+                  <a:srgbClr val="075985"/>
+                </a:solidFill>
+                <a:latin typeface="Calibri" pitchFamily="34" charset="0"/>
+                <a:ea typeface="Calibri" pitchFamily="34" charset="-122"/>
+                <a:cs typeface="Calibri" pitchFamily="34" charset="-120"/>
+              </a:rPr>
+              <a:t> · la virgola fissa</a:t>
+            </a:r>
+            <a:endParaRPr lang="en-US" sz="1100" dirty="0"/>
+          </a:p>
+        </p:txBody>
+      </p:sp>
+      <p:sp>
+        <p:nvSpPr>
           <p:cNvPr id="25" name="Slide Number Placeholder 0"/>
           <p:cNvSpPr>
             <a:spLocks noGrp="1"/>
@@ -30233,6 +32315,133 @@
               <a:t>mantissa, base ed esponente: la notazione scientifica del laboratorio, in binario</a:t>
             </a:r>
             <a:endParaRPr lang="en-US" sz="1900" dirty="0"/>
+          </a:p>
+        </p:txBody>
+      </p:sp>
+      <p:sp>
+        <p:nvSpPr>
+          <p:cNvPr id="14" name="Shape 12"/>
+          <p:cNvSpPr/>
+          <p:nvPr/>
+        </p:nvSpPr>
+        <p:spPr>
+          <a:xfrm>
+            <a:off x="7526350" y="91440"/>
+            <a:ext cx="4116705" cy="274320"/>
+          </a:xfrm>
+          <a:prstGeom prst="rect">
+            <a:avLst/>
+          </a:prstGeom>
+          <a:solidFill>
+            <a:srgbClr val="E0F2FE"/>
+          </a:solidFill>
+          <a:ln w="12700">
+            <a:solidFill>
+              <a:srgbClr val="0369A1"/>
+            </a:solidFill>
+            <a:prstDash val="solid"/>
+          </a:ln>
+        </p:spPr>
+      </p:sp>
+      <p:sp>
+        <p:nvSpPr>
+          <p:cNvPr id="15" name="Shape 13"/>
+          <p:cNvSpPr/>
+          <p:nvPr/>
+        </p:nvSpPr>
+        <p:spPr>
+          <a:xfrm>
+            <a:off x="7526350" y="91440"/>
+            <a:ext cx="73152" cy="274320"/>
+          </a:xfrm>
+          <a:prstGeom prst="rect">
+            <a:avLst/>
+          </a:prstGeom>
+          <a:solidFill>
+            <a:srgbClr val="0369A1"/>
+          </a:solidFill>
+          <a:ln w="12700">
+            <a:solidFill>
+              <a:srgbClr val="0369A1"/>
+            </a:solidFill>
+            <a:prstDash val="solid"/>
+          </a:ln>
+        </p:spPr>
+      </p:sp>
+      <p:pic>
+        <p:nvPicPr>
+          <p:cNvPr id="16" name="Image 0" descr="preencoded.png">    </p:cNvPr>
+          <p:cNvPicPr>
+            <a:picLocks noChangeAspect="1"/>
+          </p:cNvPicPr>
+          <p:nvPr/>
+        </p:nvPicPr>
+        <p:blipFill>
+          <a:blip r:embed="rId1"/>
+          <a:stretch>
+            <a:fillRect/>
+          </a:stretch>
+        </p:blipFill>
+        <p:spPr>
+          <a:xfrm>
+            <a:off x="7654366" y="128016"/>
+            <a:ext cx="201168" cy="201168"/>
+          </a:xfrm>
+          <a:prstGeom prst="rect">
+            <a:avLst/>
+          </a:prstGeom>
+        </p:spPr>
+      </p:pic>
+      <p:sp>
+        <p:nvSpPr>
+          <p:cNvPr id="17" name="Text 14"/>
+          <p:cNvSpPr txBox="1"/>
+          <p:nvPr/>
+        </p:nvSpPr>
+        <p:spPr>
+          <a:xfrm>
+            <a:off x="7910398" y="91440"/>
+            <a:ext cx="3696081" cy="274320"/>
+          </a:xfrm>
+          <a:prstGeom prst="rect">
+            <a:avLst/>
+          </a:prstGeom>
+          <a:noFill/>
+          <a:ln/>
+        </p:spPr>
+        <p:txBody>
+          <a:bodyPr wrap="square" lIns="0" tIns="0" rIns="0" bIns="0" rtlCol="0" anchor="ctr"/>
+          <a:lstStyle/>
+          <a:p>
+            <a:pPr indent="0" marL="0">
+              <a:buNone/>
+            </a:pPr>
+            <a:r>
+              <a:rPr lang="en-US" sz="1100" b="1" dirty="0">
+                <a:solidFill>
+                  <a:srgbClr val="075985"/>
+                </a:solidFill>
+                <a:latin typeface="Calibri" pitchFamily="34" charset="0"/>
+                <a:ea typeface="Calibri" pitchFamily="34" charset="-122"/>
+                <a:cs typeface="Calibri" pitchFamily="34" charset="-120"/>
+              </a:rPr>
+              <a:t>DA COMPRENDERE OGGI</a:t>
+            </a:r>
+            <a:pPr indent="0" marL="0">
+              <a:buNone/>
+            </a:pPr>
+            <a:r>
+              <a:rPr lang="en-US" sz="1100" dirty="0">
+                <a:solidFill>
+                  <a:srgbClr val="075985"/>
+                </a:solidFill>
+                <a:latin typeface="Calibri" pitchFamily="34" charset="0"/>
+                <a:ea typeface="Calibri" pitchFamily="34" charset="-122"/>
+                <a:cs typeface="Calibri" pitchFamily="34" charset="-120"/>
+              </a:rPr>
+              <a:t> · la virgola mobile IEEE 754</a:t>
+            </a:r>
+            <a:endParaRPr lang="en-US" sz="1100" dirty="0"/>
           </a:p>
         </p:txBody>
       </p:sp>

--- a/it/slides/06-Architettura_dei_Calcolatori-Rappresentazione_dei_Numeri_Reali.pptx
+++ b/it/slides/06-Architettura_dei_Calcolatori-Rappresentazione_dei_Numeri_Reali.pptx
@@ -126,13 +126,13 @@
   <p:extLst>
     <p:ext uri="{521415D9-36F7-43E2-AB2F-B90AF26B5E84}">
       <p14:sectionLst xmlns:p14="http://schemas.microsoft.com/office/powerpoint/2010/main">
-        <p14:section name="Apertura" id="{536758cd-361e-599a-d58e-122eba8361a3}">
+        <p14:section name="Apertura" id="{aa32b552-cc66-7d4d-cc6c-b7dd753e5f8c}">
           <p14:sldIdLst>
             <p14:sldId id="256"/>
             <p14:sldId id="257"/>
           </p14:sldIdLst>
         </p14:section>
-        <p14:section name="Altre codifiche per gli interi con segno" id="{203b12cb-2807-4f0f-e78f-86b784e26ba6}">
+        <p14:section name="Altre codifiche per gli interi con segno" id="{25342410-0fca-262b-6e88-ea332f4a3d19}">
           <p14:sldIdLst>
             <p14:sldId id="258"/>
             <p14:sldId id="259"/>
@@ -140,13 +140,13 @@
             <p14:sldId id="261"/>
           </p14:sldIdLst>
         </p14:section>
-        <p14:section name="Virgola fissa" id="{a659c8a0-ca49-2ac5-486f-2f446c14f0d1}">
+        <p14:section name="Virgola fissa" id="{caa95099-e098-64c0-e239-b659fcb44aa8}">
           <p14:sldIdLst>
             <p14:sldId id="262"/>
             <p14:sldId id="263"/>
           </p14:sldIdLst>
         </p14:section>
-        <p14:section name="Virgola mobile" id="{24db0f13-1447-a0b6-fc50-bfea36d2ab27}">
+        <p14:section name="Virgola mobile" id="{8054ba29-0b8d-9fe3-1b1e-fcccbac582f0}">
           <p14:sldIdLst>
             <p14:sldId id="264"/>
             <p14:sldId id="265"/>
@@ -156,7 +156,7 @@
             <p14:sldId id="269"/>
           </p14:sldIdLst>
         </p14:section>
-        <p14:section name="Ritorno alla macchina" id="{efe0619c-1366-e977-25af-204b96d4dc68}">
+        <p14:section name="Ritorno alla macchina" id="{6d7a675f-1a75-5124-df57-738d634a259b}">
           <p14:sldIdLst>
             <p14:sldId id="270"/>
             <p14:sldId id="271"/>

--- a/it/slides/06-Architettura_dei_Calcolatori-Rappresentazione_dei_Numeri_Reali.pptx
+++ b/it/slides/06-Architettura_dei_Calcolatori-Rappresentazione_dei_Numeri_Reali.pptx
@@ -126,13 +126,13 @@
   <p:extLst>
     <p:ext uri="{521415D9-36F7-43E2-AB2F-B90AF26B5E84}">
       <p14:sectionLst xmlns:p14="http://schemas.microsoft.com/office/powerpoint/2010/main">
-        <p14:section name="Apertura" id="{aa32b552-cc66-7d4d-cc6c-b7dd753e5f8c}">
+        <p14:section name="Apertura" id="{3a283a3d-438c-4f54-c2e3-7936b6d83bae}">
           <p14:sldIdLst>
             <p14:sldId id="256"/>
             <p14:sldId id="257"/>
           </p14:sldIdLst>
         </p14:section>
-        <p14:section name="Altre codifiche per gli interi con segno" id="{25342410-0fca-262b-6e88-ea332f4a3d19}">
+        <p14:section name="Altre codifiche per gli interi con segno" id="{50213fdf-dc3c-cbd1-e365-5358ce56be31}">
           <p14:sldIdLst>
             <p14:sldId id="258"/>
             <p14:sldId id="259"/>
@@ -140,13 +140,13 @@
             <p14:sldId id="261"/>
           </p14:sldIdLst>
         </p14:section>
-        <p14:section name="Virgola fissa" id="{caa95099-e098-64c0-e239-b659fcb44aa8}">
+        <p14:section name="Virgola fissa" id="{b04fcad5-a603-386f-7a05-ecc380313e79}">
           <p14:sldIdLst>
             <p14:sldId id="262"/>
             <p14:sldId id="263"/>
           </p14:sldIdLst>
         </p14:section>
-        <p14:section name="Virgola mobile" id="{8054ba29-0b8d-9fe3-1b1e-fcccbac582f0}">
+        <p14:section name="Virgola mobile" id="{8dcce291-4393-c56b-3a28-ac6b5fe5933b}">
           <p14:sldIdLst>
             <p14:sldId id="264"/>
             <p14:sldId id="265"/>
@@ -156,7 +156,7 @@
             <p14:sldId id="269"/>
           </p14:sldIdLst>
         </p14:section>
-        <p14:section name="Ritorno alla macchina" id="{6d7a675f-1a75-5124-df57-738d634a259b}">
+        <p14:section name="Ritorno alla macchina" id="{ae96f7ff-86cc-0b63-8c16-143af77aa42c}">
           <p14:sldIdLst>
             <p14:sldId id="270"/>
             <p14:sldId id="271"/>
@@ -570,7 +570,7 @@
           <a:p>
             <a:r>
               <a:rPr lang="en-US" dirty="0"/>
-              <a:t>La lezione precedente trattava i numeri interi. Questa tratta i numeri con una parte frazionaria, e parte da un problema pratico: una palla che deve spostarsi di meno di un pixel per frame, su un processore che non ha istruzioni per i numeri reali. La soluzione, la virgola fissa, usa solo ciò che già conoscete. La virgola mobile compare poi come risposta generale, con lo standard seguito da ogni calcolatore, IEEE 754.
+              <a:t>La lezione precedente ha trattato gli interi; questa tratta i numeri con una parte frazionaria. Comincia da un problema ingegneristico concreto: una pallina deve muoversi di meno di un pixel per frame, su un processore privo di istruzioni per i numeri reali. La prima soluzione, la virgola fissa, non usa nulla al di là dell'aritmetica intera già compresa. La virgola mobile emerge poi come soluzione generale, insieme allo standard a cui si conforma sostanzialmente ogni calcolatore, IEEE 754. La lezione è quindi organizzata come una progressione da un vincolo specifico a una teoria generale, e di nuovo al vincolo.
 Stato di apprendimento: DA COMPRENDERE OGGI, alla fine di questa lezione lo spiegate, lo seguite passo passo e lo applicate da soli; DA UTILIZZARE OGGI, oggi seguite e usate la ricetta; come funziona dentro si spiega più avanti, o non fa parte del corso; DA COMPRENDERE PIÙ AVANTI, riconoscete il nome e lo scopo; lo spiega una lezione successiva. Una slide senza etichetta è contesto: una storia, un esempio, una domanda, un esercizio.
 Stato di apprendimento di questa lezione. DA COMPRENDERE OGGI: la virgola fissa; complemento a uno ed eccesso k; la virgola mobile IEEE 754; il nome RV32IMAC. DA UTILIZZARE OGGI: il programma completo, gli strumenti di PRG32 (si usa, non si studia, in questo corso). DA COMPRENDERE PIÙ AVANTI: niente. Una slide senza etichetta è contesto: una storia, un esempio, una domanda, un esercizio.
 Per il docente: Spirale: la lezione si apre con una palla che deve muoversi di meno di un pixel per frame su un processore senza unità in virgola mobile. La virgola fissa risolve il problema; la virgola mobile viene poi presentata come risposta generale, con IEEE 754.</a:t>
@@ -661,7 +661,7 @@
           <a:p>
             <a:r>
               <a:rPr lang="en-US" dirty="0"/>
-              <a:t>In virgola mobile la distanza tra due numeri rappresentabili consecutivi non è costante. Vicino a zero sono vicinissimi; vicino al limite superiore sono molto distanti. L'errore assoluto cresce quindi con la grandezza del numero. Ciò che resta costante è l'errore relativo, perché ogni numero ha lo stesso numero di cifre significative: quattro in questo esempio. È l'opposto della virgola fissa, dove l'errore assoluto è costante e quello relativo diventa grande vicino a zero.
+              <a:t>In virgola mobile la distanza tra numeri rappresentabili consecutivi non è uniforme: è molto fine vicino a zero e grossolana vicino al limite superiore dell'intervallo. L'errore assoluto cresce quindi con il modulo del numero. Ciò che resta approssimativamente costante è l'errore relativo, perché ogni numero porta lo stesso numero di cifre significative, quattro in questo esempio. La virgola fissa mostra il comportamento opposto: errore assoluto costante, con un errore relativo che diventa grande vicino a zero. La scelta tra le due è una scelta su quale errore conti per l'applicazione.
 DA COMPRENDERE OGGI: la virgola mobile IEEE 754.
 Per il docente: È l'opposto della virgola fissa, dove l'errore assoluto è costante e quello relativo esplode vicino a zero.</a:t>
             </a:r>
@@ -751,7 +751,7 @@
           <a:p>
             <a:r>
               <a:rPr lang="en-US" dirty="0"/>
-              <a:t>Il formato a singola precisione di IEEE 754 divide 32 bit in tre campi: un bit di segno, otto di esponente, ventitré di frazione. Il valore è dato dalla formula al centro. Due dettagli meritano attenzione. Una mantissa binaria normalizzata comincia sempre con 1, quindi quel bit non si memorizza: è il bit nascosto, e regala un bit di precisione in più. E l'esponente è memorizzato in eccesso 127, la codifica della sezione precedente, così gli esponenti si confrontano come numeri naturali.
+              <a:t>Il formato IEEE 754 in precisione singola divide 32 bit in tre campi: un bit di segno, otto bit di esponente e ventitré bit di frazione, con il valore dato dalla formula al centro. Due decisioni di progetto meritano attenzione. Una mantissa binaria normalizzata comincia sempre con 1, quindi quel bit non va memorizzato: è il bit nascosto, che dà gratis un bit di precisione in più. E l'esponente è memorizzato in eccesso 127, la codifica della sezione precedente, così che numeri in virgola mobile dello stesso segno si possono confrontare come numeri naturali.
 DA COMPRENDERE OGGI: la virgola mobile IEEE 754.
 Per il docente: IEEE 754 è del 1985 (rivisto nel 2008 e nel 2019). Prima ogni costruttore aveva il proprio formato e i programmi davano risultati diversi su macchine diverse.</a:t>
             </a:r>
@@ -841,7 +841,7 @@
           <a:p>
             <a:r>
               <a:rPr lang="en-US" dirty="0"/>
-              <a:t>Un esempio completo: meno 5,125. Si convertono in binario le due parti: 5 è 101 e 0,125 è 0,001, quindi il numero è 101,001. Si normalizza spostando la virgola di due posti: 1,01001 per 2 alla 2. Il bit di segno è 1. Il campo esponente è 2 più 127, 129, cioè 1000 0001. La frazione è 01001 seguita da zeri, senza l'1 iniziale. Mettendo insieme i tre campi e raggruppando a quattro a quattro si ottiene 0xC0A40000. Rifatelo su carta, poi provate con un altro numero.
+              <a:t>Un esempio svolto completo: -5,125. Parte intera e parte frazionaria si convertono separatamente: 5 è 101 e 0,125 è 0,001, quindi il numero è 101,001. La normalizzazione sposta la virgola di due posti: 1,01001 per 2^2. Il bit di segno è 1. Il campo esponente è 2 + 127 = 129, cioè 1000 0001. Il campo frazione è 01001 seguito da zeri, senza l'1 iniziale. Concatenando i tre campi e raggruppando a quattro bit si ottiene 0xC0A40000. L'esempio va riprodotto su carta e poi ripetuto con un numero scelto da sé.
 DA COMPRENDERE OGGI: la virgola mobile IEEE 754.
 Per il docente: Verificare il raggruppamento in nibble: 1100 = C, 0000 = 0, 1010 = A, 0100 = 4, poi zeri. Qui sono unite tre slide della presentazione originale.</a:t>
             </a:r>
@@ -931,7 +931,7 @@
           <a:p>
             <a:r>
               <a:rPr lang="en-US" dirty="0"/>
-              <a:t>Singola e doppia precisione a confronto. La doppia precisione ha 64 bit, 11 di esponente in eccesso 1023 e 52 di frazione. Due righe vanno ricordate come ordini di grandezza: la singola precisione dà circa 7 cifre decimali significative e arriva a circa 10 alla 38; la doppia ne dà circa 16 e arriva a circa 10 alla 308. I tipi float e double del linguaggio C sono questi due formati.
+              <a:t>Precisione singola e doppia a confronto. La precisione doppia usa 64 bit, con 11 bit di esponente in eccesso 1023 e 52 bit di frazione. Due righe valgono come ordini di grandezza da ricordare: la precisione singola offre circa 7 cifre decimali significative e un intervallo che arriva a circa 10^38; la doppia circa 16 cifre e un intervallo che arriva a circa 10^308. I tipi C float e double corrispondono a questi due formati praticamente su ogni piattaforma moderna.
 DA COMPRENDERE OGGI: la virgola mobile IEEE 754.
 Per il docente: Correzioni alla tabella originale: l'esponente in doppia precisione è in eccesso 1023 (non 1024), e gli intervalli decimali sono circa 10^38 e 10^308.</a:t>
             </a:r>
@@ -1021,7 +1021,7 @@
           <a:p>
             <a:r>
               <a:rPr lang="en-US" dirty="0"/>
-              <a:t>Non tutte le configurazioni sono numeri ordinari. Un campo esponente compreso tra i due estremi è un numero normalizzato. Un esponente di tutti zeri significa zero, se anche la frazione è zero, oppure un numero denormalizzato, che riempie il vuoto attorno allo zero con precisione decrescente. Un esponente di tutti uni significa infinito, se la frazione è zero, oppure NaN, «non un numero», il risultato di un'operazione non valida come zero diviso zero. Notate che gli zeri sono due, più e meno, e che NaN non è uguale a nulla, nemmeno a se stesso.
+              <a:t>Non ogni configurazione codifica un numero ordinario. Un campo esponente strettamente compreso tra i suoi estremi indica un numero normalizzato. Un esponente tutto a zero indica lo zero, se anche la frazione è zero, oppure un numero denormalizzato, che riempie il vuoto attorno allo zero con precisione gradualmente decrescente. Un esponente tutto a uno indica l'infinito, se la frazione è zero, oppure NaN, "not a number", il risultato di un'operazione non valida come zero diviso zero. Due conseguenze sono controintuitive e vanno notate: ci sono due zeri, positivo e negativo, e NaN risulta diverso da tutto, sé stesso compreso.
 DA COMPRENDERE OGGI: la virgola mobile IEEE 754.
 Per il docente: I numeri denormalizzati (subnormali) riempiono il vuoto dell'underflow attorno allo zero con precisione via via decrescente. 1/0 dà infinito; 0/0 e la radice quadrata di -1 danno NaN. NaN non è uguale a nulla, nemmeno a se stesso.</a:t>
             </a:r>
@@ -1111,7 +1111,7 @@
           <a:p>
             <a:r>
               <a:rPr lang="en-US" dirty="0"/>
-              <a:t>RISC-V tratta la virgola mobile con due estensioni facoltative, F per la singola precisione e D per la doppia: aggiungono trentadue registri, da f0 a f31, e istruzioni come fadd.s. Il processore del kit, RV32IMAC, non ha né l'una né l'altra. Un programma C può comunque usare float, ma ogni operazione diventa la chiamata di una routine software che costa decine o centinaia di istruzioni intere. Per questo i giochi PRG32 usano interi e virgola fissa: sono veloci, abbastanza esatti, e visibili nel debugger.
+              <a:t>RISC-V supporta la virgola mobile con due estensioni facoltative, F per la precisione singola e D per la doppia, che aggiungono trentadue registri, da f0 a f31, e istruzioni come fadd.s. Il processore del kit, RV32IMAC, non implementa né l'una né l'altra. Un programma C può comunque usare float, ma ogni operazione viene allora compilata come chiamata a una routine software che costa decine o centinaia di istruzioni intere. È per questo che i giochi PRG32 usano interi e virgola fissa: sono veloci, sufficientemente precisi per lo scopo e trasparenti nel debugger.
 DA COMPRENDERE OGGI: la virgola mobile IEEE 754.
 Per il docente: Le routine software realizzano esattamente l'algoritmo di questa lezione con scorrimenti, maschere e somme intere: un buon esercizio di lettura per la fine del corso.</a:t>
             </a:r>
@@ -1201,7 +1201,7 @@
           <a:p>
             <a:r>
               <a:rPr lang="en-US" dirty="0"/>
-              <a:t>Il nome RV32IMAC si può ora leggere lettera per lettera. RV32I è la base: registri a 32 bit e istruzioni intere. M aggiunge moltiplicazione e divisione. A aggiunge le istruzioni atomiche per condividere dati in sicurezza tra task. C aggiunge le codifiche compresse, a 16 bit, delle istruzioni più comuni. F e D, le estensioni in virgola mobile, mancano. Questa modularità è una scelta di progetto di RISC-V: una piccola base obbligatoria ed estensioni facoltative, così che la stessa architettura vada bene per un microcontrollore economico e per un supercalcolatore.
+              <a:t>Il nome RV32IMAC si può ora leggere lettera per lettera. RV32I è la base: registri a 32 bit e le istruzioni intere. M aggiunge moltiplicazione e divisione. A aggiunge le istruzioni atomiche, per la condivisione sicura di dati tra attività concorrenti. C aggiunge codifiche compresse a 16 bit delle istruzioni più frequenti. F e D, le estensioni in virgola mobile, sono assenti. Questa modularità è un principio di progetto centrale di RISC-V: una piccola base obbligatoria ed estensioni facoltative, così che la stessa architettura possa servire un microcontrollore economico e un supercalcolatore.
 DA COMPRENDERE OGGI: il nome RV32IMAC.
 Per il docente: RISC-V è modulare: una piccola base obbligatoria più estensioni facoltative. Un microcontrollore prende ciò che gli serve; è una delle ragioni per cui la stessa architettura va da un chip da due euro a un supercalcolatore.</a:t>
             </a:r>
@@ -1291,8 +1291,8 @@
           <a:p>
             <a:r>
               <a:rPr lang="en-US" dirty="0"/>
-              <a:t>Pensate a che cosa fa ciascuna codifica all'ordine. In segno e modulo e nei complementi i numeri negativi hanno il bit più a sinistra a 1, quindi come configurazioni vengono dopo i positivi. Solo una codifica che somma una costante a ogni numero lascia intatto l'ordine.
-Q24.8 significa che la parola è il numero moltiplicato per 256. Leggete 0x180 come intero e dividete per 256; oppure spezzatelo direttamente: parte intera 0x01, frazione 0x80, cioè 128/256.
+              <a:t>Per la prima domanda conviene considerare che cosa fa ogni codifica all'ordinamento. In segno e modulo e in entrambi i complementi i numeri negativi hanno un 1 a sinistra e quindi, letti come configurazioni, seguono quelli positivi. Solo una codifica che somma una costante a ogni numero conserva l'ordine.
+Per la seconda, Q24.8 significa che la parola contiene il numero moltiplicato per 256. 0x180 si legge come intero e si divide per 256; in alternativa lo si divide direttamente in parte intera 0x01 e frazione 0x80, cioè 128/256.
 Per il docente: 1. Risposta: D. In eccesso k, X = x + k: a un numero maggiore corrisponde sempre una configurazione maggiore. Per questo codifica gli esponenti della virgola mobile, che vanno confrontati in fretta.
 2. Risposta: B. 0x180 = 384; 384 / 256 = 1,5. Parte intera 0x01, frazione 0x80 = 128/256 = 0,5.</a:t>
             </a:r>
@@ -1382,8 +1382,8 @@
           <a:p>
             <a:r>
               <a:rPr lang="en-US" dirty="0"/>
-              <a:t>Scrivete in binario le prime cifre esadecimali e tagliate i campi: un bit di segno, otto di esponente, poi la frazione. Sottraete 127 dall'esponente, e non dimenticate l'1 nascosto davanti alla frazione.
-Tornate alla tabella delle configurazioni speciali. Un esponente di tutti uni è riservato: quale dei suoi due casi ha la frazione di tutti zeri?
+              <a:t>Per la prima domanda le prime cifre esadecimali si scrivono in binario e si separano i campi: un bit di segno, otto bit di esponente, poi la frazione. Dall'esponente si sottrae la polarizzazione di 127, e davanti alla frazione si ripristina l'1 nascosto.
+Per la seconda va consultata la tabella delle configurazioni speciali. Un esponente tutto a uno è riservato; la domanda è quale dei suoi due casi abbia una frazione tutta a zero.
 Per il docente: 1. Risposta: B. 0100 0000 0100 0000 ...: S = 0, E = 1000 0000 = 128, F = 100...: 1,1 (binario) x 2^(128-127) = 1,5 x 2 = 3,0.
 2. Risposta: C. Tutti uni nell'esponente: infinito se la frazione è zero, NaN altrimenti.</a:t>
             </a:r>
@@ -1473,7 +1473,7 @@
           <a:p>
             <a:r>
               <a:rPr lang="en-US" dirty="0"/>
-              <a:t>Dodici termini. In inglese il separatore decimale è il punto, quindi virgola fissa e virgola mobile sono fixed point e floating point. Mantissa è la parola tradizionale per le cifre significative; lo standard chiama fraction la parte memorizzata. Il bit nascosto, hidden bit, è l'1 iniziale che non si memorizza. I numeri denormalizzati si dicono anche subnormali.</a:t>
+              <a:t>Dodici termini. In italiano il separatore decimale è la virgola, quindi fixed point e floating point diventano virgola fissa e virgola mobile. Mantissa è il termine tradizionale per le cifre significative; lo standard chiama la parte memorizzata frazione. Il bit nascosto è l'1 iniziale non memorizzato. I numeri denormalizzati si dicono anche subnormali.</a:t>
             </a:r>
             <a:endParaRPr lang="en-US" dirty="0"/>
           </a:p>
@@ -1561,7 +1561,7 @@
           <a:p>
             <a:r>
               <a:rPr lang="en-US" dirty="0"/>
-              <a:t>Sei obiettivi. Due codifiche degli interi con segno che completano la lezione precedente, complemento a uno ed eccesso k: servono per capire la virgola mobile. Poi la virgola fissa, che userete nel progetto. Poi la virgola mobile: mantissa, esponente, normalizzazione, codifica e decodifica di un numero in singola precisione, e le configurazioni speciali. Infine un fatto sul vostro kit: il suo processore non ha istruzioni in virgola mobile, e saprete dire che cosa fanno invece i programmi.</a:t>
+              <a:t>Sei risultati di apprendimento. Due ulteriori codifiche degli interi con segno, il complemento a uno e l'eccesso k, completano la lezione precedente e sono prerequisiti della virgola mobile. Segue la rappresentazione in virgola fissa, che il progetto del corso userà. Poi la virgola mobile: mantissa, esponente e normalizzazione, codifica e decodifica in precisione singola, e le configurazioni speciali. L'ultimo risultato riguarda il kit dello studente: il suo processore non ha istruzioni in virgola mobile, e lo studente deve saper spiegare che cosa fanno invece i programmi, e perché.</a:t>
             </a:r>
             <a:endParaRPr lang="en-US" dirty="0"/>
           </a:p>
@@ -1649,7 +1649,7 @@
           <a:p>
             <a:r>
               <a:rPr lang="en-US" dirty="0"/>
-              <a:t>Cinque conclusioni. Gli interi hanno diverse rappresentazioni, scelte in base all'uso. La virgola fissa memorizza una frazione come intero scalato: errore assoluto costante, velocità degli interi. La virgola mobile memorizza mantissa ed esponente: intervallo enorme, errore relativo costante. IEEE 754 è lo standard universale, con configurazioni speciali per zero, infinito e NaN. E su un processore senza l'estensione F la virgola fissa è la scelta naturale. Ora viene la prima parte di Verm1, dove le ultime quattro lezioni si mettono al lavoro.
+              <a:t>Cinque conclusioni. Gli interi ammettono più rappresentazioni, scelte secondo l'uso. La virgola fissa memorizza una frazione come intero scalato, con errore assoluto costante e la velocità dell'aritmetica intera. La virgola mobile memorizza mantissa ed esponente, con un intervallo enorme ed errore relativo approssimativamente costante. IEEE 754 è lo standard universale, con configurazioni speciali per lo zero, l'infinito e NaN. Su un processore privo dell'estensione F, la virgola fissa è la scelta naturale. La prossima lezione è la prima parte di Verm1, in cui il contenuto delle ultime quattro lezioni viene messo al lavoro.
 Stato di apprendimento, riepilogo. DA COMPRENDERE OGGI: la virgola fissa; complemento a uno ed eccesso k; la virgola mobile IEEE 754; il nome RV32IMAC. DA UTILIZZARE OGGI: il programma completo, gli strumenti di PRG32 (si usa, non si studia, in questo corso). DA COMPRENDERE PIÙ AVANTI: niente. Una slide senza etichetta è contesto: una storia, un esempio, una domanda, un esercizio.
 Per il docente: A seguire: Verm1, parte 1, dove le prime quattro lezioni vanno a lavorare in un programma vero. Poi l'algebra di Boole.</a:t>
             </a:r>
@@ -1739,7 +1739,7 @@
           <a:p>
             <a:r>
               <a:rPr lang="en-US" dirty="0"/>
-              <a:t>In complemento a uno un numero negativo si ottiene invertendo ogni bit del positivo: 6 è 0110, meno 6 è 1001. Cambiare segno non potrebbe essere più semplice. Il prezzo è lo stesso del segno e modulo: lo zero ha due rappresentazioni, 0000 e 1111, e l'intervallo è simmetrico, da meno 7 a più 7 su quattro bit. L'istruzione not di RISC-V calcola esattamente il complemento a uno di un registro.
+              <a:t>In complemento a uno un numero negativo si ottiene invertendo ogni bit del suo corrispondente positivo: 6 è 0110, -6 è 1001. Il cambio di segno non potrebbe essere più semplice. Il costo è quello già pagato da segno e modulo: lo zero ha due rappresentazioni, 0000 e 1111, e l'intervallo è simmetrico, da -7 a +7 su quattro bit. L'istruzione RISC-V not calcola esattamente il complemento a uno di un registro, e la lezione precedente ha mostrato che sommandogli 1 si ottiene il complemento a due.
 DA COMPRENDERE OGGI: complemento a uno ed eccesso k.
 Per il docente: Detto anche complemento alla base diminuita. La not bit a bit di RISC-V calcola esattamente questo.</a:t>
             </a:r>
@@ -1829,7 +1829,7 @@
           <a:p>
             <a:r>
               <a:rPr lang="en-US" dirty="0"/>
-              <a:t>La somma in complemento a uno funziona con l'addizionatore ordinario, con una correzione: quando c'è un riporto uscente dal bit più a sinistra, al risultato va sommato 1. Si chiama riporto circolare. Il primo esempio non richiede correzione. Nel secondo e nel terzo il riporto uscente fa il giro e viene sommato. Il passo in più e il doppio zero sono le ragioni per cui ha vinto il complemento a due, in cui il riporto si scarta e basta.
+              <a:t>La somma in complemento a uno usa un normale sommatore binario con una correzione: quando un riporto esce dalla posizione più significativa, al risultato va sommato 1, un'operazione nota come riporto circolare. Il primo esempio non richiede correzione; nel secondo e nel terzo il riporto uscente viene riportato in fondo e sommato. Questo passo in più, insieme al doppio zero, spiega perché nel progetto delle unità aritmetiche si è affermato il complemento a due, in cui il riporto uscente si scarta semplicemente.
 DA COMPRENDERE OGGI: complemento a uno ed eccesso k.
 Per il docente: Le slide originali chiamano il riporto «overflow nell'aritmetica degli interi positivi»: è il riporto uscente dell'addizionatore dei naturali, reinterpretato come necessità di una correzione.</a:t>
             </a:r>
@@ -1919,7 +1919,7 @@
           <a:p>
             <a:r>
               <a:rPr lang="en-US" dirty="0"/>
-              <a:t>In eccesso k ogni numero è traslato verso l'alto di una costante: X = x + k. Con quattro bit e k = 8, la configurazione 0000 significa meno 8, 1000 significa zero e 1111 significa più 7. La proprietà preziosa è che l'ordine si conserva: a un numero maggiore corrisponde sempre una configurazione maggiore, quindi due numeri con segno si confrontano come se fossero naturali. L'aritmetica è meno comoda, perché ogni somma va corretta. È la codifica dell'esponente nei numeri in virgola mobile.
+              <a:t>Nella rappresentazione in eccesso k ogni numero è spostato verso l'alto di una costante: X = x + k. Con quattro bit e k = 8, la configurazione 0000 indica -8, 1000 indica zero e 1111 indica +7. La sua proprietà preziosa è la conservazione dell'ordine: un numero più grande ha sempre una configurazione più grande, quindi due valori con segno si possono confrontare come se fossero numeri naturali. L'aritmetica è meno comoda, perché ogni somma va corretta sottraendo k. È proprio la codifica dell'esponente nei formati in virgola mobile, dove il confronto rapido conta più della somma comoda.
 DA COMPRENDERE OGGI: complemento a uno ed eccesso k.
 Per il docente: Eccesso 8 su quattro bit: 0000 = -8, 1000 = 0, 1111 = +7. Si confronti con il complemento a due: stesso intervallo, con il bit più significativo invertito.</a:t>
             </a:r>
@@ -2009,7 +2009,7 @@
           <a:p>
             <a:r>
               <a:rPr lang="en-US" dirty="0"/>
-              <a:t>La tabella della Lezione 05 con due colonne in più: le stesse sedici configurazioni lette senza segno, in segno e modulo, in complemento a uno, in complemento a due e in eccesso 8. Tre osservazioni. Segno e modulo e complemento a uno hanno due zeri, evidenziati. Complemento a due ed eccesso 8 coprono lo stesso intervallo, da meno 8 a più 7, e differiscono solo nel bit più a sinistra. E l'eccesso 8 è l'unica colonna in cui i valori crescono con regolarità dall'alto al basso della tabella.
+              <a:t>La tabella della Lezione 05, estesa di due colonne: le stesse sedici configurazioni lette senza segno, in segno e modulo, in complemento a uno, in complemento a due e in eccesso 8. Tre osservazioni. Segno e modulo e complemento a uno hanno ciascuno due zeri, evidenziati. Complemento a due ed eccesso 8 coprono lo stesso intervallo, da -8 a +7, e differiscono solo nel bit più a sinistra. E l'eccesso 8 è l'unica colonna in cui i valori crescono monotonamente dall'alto al basso della tabella, che è la proprietà di conservazione dell'ordine in forma visiva.
 DA COMPRENDERE OGGI: complemento a uno ed eccesso k.
 Per il docente: Questa tabella sostituisce la figura di confronto della presentazione originale («Numeri relativi: complementi»).</a:t>
             </a:r>
@@ -2099,7 +2099,7 @@
           <a:p>
             <a:r>
               <a:rPr lang="en-US" dirty="0"/>
-              <a:t>In virgola fissa la parte intera e la parte frazionaria stanno fianco a fianco in una parola, e la posizione della virgola è fissa. Non è memorizzata da nessuna parte: è un accordo che il programma conosce. Se f bit sono riservati alla frazione, la parola contiene il numero moltiplicato per 2 alla f, e il passo più piccolo rappresentabile, la risoluzione, è 2 alla meno f. La notazione Qm.f dice come sono divisi i bit: Q24.8 significa 24 bit interi e 8 bit frazionari.
+              <a:t>In virgola fissa la parte intera e la parte frazionaria occupano posizioni adiacenti in una parola, e la posizione della virgola binaria è fissa. Non è memorizzata da nessuna parte: è una convenzione nota al programma. Se si riservano f bit alla frazione, la parola contiene il numero moltiplicato per 2^f, e il più piccolo incremento rappresentabile, la risoluzione, è 2^-f. La notazione Qm.f specifica la divisione dei bit: Q24.8 indica 24 bit interi e 8 bit frazionari. L'aritmetica è l'ordinaria aritmetica intera, con un riscalamento solo dove un prodotto o un quoziente lo richiedono.
 DA COMPRENDERE OGGI: la virgola fissa.
 Per il docente: La virgola fissa è il modo in cui giochi, audio e software di controllo trattano le frazioni sui processori senza unità in virgola mobile. È anche il modo in cui si dovrebbe memorizzare il denaro: centesimi interi.</a:t>
             </a:r>
@@ -2189,7 +2189,7 @@
           <a:p>
             <a:r>
               <a:rPr lang="en-US" dirty="0"/>
-              <a:t>I numeri reali sono densi: tra due qualsiasi ce ne sono infiniti altri, quindi con un numero finito di bit la maggior parte non si può rappresentare, e ciascuno è sostituito dal più vicino tra quelli rappresentabili. In Q24.8 il numero 0,1 diventa 26/256, circa 0,1016. L'errore è al più metà della risoluzione. Un numero troppo vicino a zero diventa zero: è l'underflow, ed è il motivo per cui una velocità di 0,001 pixel per frame lascerebbe ferma la palla. In virgola fissa l'errore assoluto è lo stesso ovunque.
+              <a:t>I numeri reali sono densi: tra due qualsiasi ce ne sono infiniti altri, quindi con un numero finito di bit la maggior parte di essi non si può rappresentare, e ciascuno viene sostituito dal suo vicino rappresentabile più prossimo. In Q24.8 il numero 0,1 diventa 26/256, circa 0,1016. L'errore non supera mai metà della risoluzione. Un valore abbastanza vicino a zero si arrotonda a zero, il che è l'underflow, ed è il motivo per cui una velocità di 0,001 pixel per frame lascerebbe la pallina immobile. In virgola fissa il limite dell'errore assoluto è lo stesso su tutto l'intervallo.
 DA COMPRENDERE OGGI: la virgola fissa.
 Per il docente: 0,1 x 256 = 25,6, arrotondato a 26. Con SPEED_Q8 = 1 la palla si muove di 1/256 di pixel per frame; una velocità di 0,001 pixel per frame va in underflow a zero e la palla non si muove mai.</a:t>
             </a:r>
@@ -2279,7 +2279,7 @@
           <a:p>
             <a:r>
               <a:rPr lang="en-US" dirty="0"/>
-              <a:t>Un numero reale si scrive come una coppia: una mantissa m e un esponente e, tali che x è m per la base elevata a e. È la notazione scientifica del laboratorio di fisica. La virgola è «mobile» perché è l'esponente a dire dove si trova. Poiché lo stesso numero ha infinite coppie di questo tipo, se ne sceglie una con una regola, la normalizzazione: la virgola si mette subito dopo la prima cifra significativa, così 346,09801 diventa 3,4609801 con esponente 2.
+              <a:t>Un numero reale si rappresenta come una coppia: una mantissa m e un esponente e, tali che x sia uguale a m moltiplicato per la base elevata a e. È la notazione scientifica del laboratorio di fisica, e la virgola "galleggia" perché è l'esponente a determinarne la posizione. Poiché lo stesso numero ammette infinite coppie di questo tipo, se ne sceglie una canonica con la normalizzazione: la virgola si colloca subito dopo la prima cifra significativa, così che 346,09801 diventa 3,4609801 con esponente 2. La normalizzazione garantisce l'unicità e massimizza il numero di cifre significative conservate.
 DA COMPRENDERE OGGI: la virgola mobile IEEE 754.
 Per il docente: In altre parole, la notazione scientifica. La virgola fissa spende i bit su un intervallo fisso; la virgola mobile ne spende alcuni per dire dove si trova l'intervallo.</a:t>
             </a:r>
@@ -3359,7 +3359,7 @@
                 <a:ea typeface="Calibri" pitchFamily="34" charset="-122"/>
                 <a:cs typeface="Calibri" pitchFamily="34" charset="-120"/>
               </a:rPr>
-              <a:t>06-Architettura_dei_Calcolatori-Rappresentazione_dei_Numeri_Reali-Codice.pptx</a:t>
+              <a:t>06-Architettura_dei_Calcolatori-Rappresentazione_dei_Numeri_Reali-Lab.pptx</a:t>
             </a:r>
             <a:endParaRPr lang="en-US" sz="1300" dirty="0"/>
           </a:p>

--- a/it/slides/06-Architettura_dei_Calcolatori-Rappresentazione_dei_Numeri_Reali.pptx
+++ b/it/slides/06-Architettura_dei_Calcolatori-Rappresentazione_dei_Numeri_Reali.pptx
@@ -126,13 +126,13 @@
   <p:extLst>
     <p:ext uri="{521415D9-36F7-43E2-AB2F-B90AF26B5E84}">
       <p14:sectionLst xmlns:p14="http://schemas.microsoft.com/office/powerpoint/2010/main">
-        <p14:section name="Apertura" id="{3a283a3d-438c-4f54-c2e3-7936b6d83bae}">
+        <p14:section name="Apertura" id="{dbdcd696-9fd9-b14b-1326-cf556b5dd982}">
           <p14:sldIdLst>
             <p14:sldId id="256"/>
             <p14:sldId id="257"/>
           </p14:sldIdLst>
         </p14:section>
-        <p14:section name="Altre codifiche per gli interi con segno" id="{50213fdf-dc3c-cbd1-e365-5358ce56be31}">
+        <p14:section name="Altre codifiche per gli interi con segno" id="{4fa86a60-d310-bbd1-3dbf-b11f03bb08e3}">
           <p14:sldIdLst>
             <p14:sldId id="258"/>
             <p14:sldId id="259"/>
@@ -140,13 +140,13 @@
             <p14:sldId id="261"/>
           </p14:sldIdLst>
         </p14:section>
-        <p14:section name="Virgola fissa" id="{b04fcad5-a603-386f-7a05-ecc380313e79}">
+        <p14:section name="Virgola fissa" id="{a773d5fa-83ae-2f46-622c-9cdc2577ec39}">
           <p14:sldIdLst>
             <p14:sldId id="262"/>
             <p14:sldId id="263"/>
           </p14:sldIdLst>
         </p14:section>
-        <p14:section name="Virgola mobile" id="{8dcce291-4393-c56b-3a28-ac6b5fe5933b}">
+        <p14:section name="Virgola mobile" id="{644ae4cc-d05d-4a6e-c096-025289a469c4}">
           <p14:sldIdLst>
             <p14:sldId id="264"/>
             <p14:sldId id="265"/>
@@ -156,7 +156,7 @@
             <p14:sldId id="269"/>
           </p14:sldIdLst>
         </p14:section>
-        <p14:section name="Ritorno alla macchina" id="{ae96f7ff-86cc-0b63-8c16-143af77aa42c}">
+        <p14:section name="Ritorno alla macchina" id="{e85c641e-7af4-87e2-7061-3a5f34179aed}">
           <p14:sldIdLst>
             <p14:sldId id="270"/>
             <p14:sldId id="271"/>

--- a/it/slides/06-Architettura_dei_Calcolatori-Rappresentazione_dei_Numeri_Reali.pptx
+++ b/it/slides/06-Architettura_dei_Calcolatori-Rappresentazione_dei_Numeri_Reali.pptx
@@ -126,13 +126,13 @@
   <p:extLst>
     <p:ext uri="{521415D9-36F7-43E2-AB2F-B90AF26B5E84}">
       <p14:sectionLst xmlns:p14="http://schemas.microsoft.com/office/powerpoint/2010/main">
-        <p14:section name="Apertura" id="{dbdcd696-9fd9-b14b-1326-cf556b5dd982}">
+        <p14:section name="Apertura" id="{95a1cd89-1906-689f-2e10-a8cb18c97ca2}">
           <p14:sldIdLst>
             <p14:sldId id="256"/>
             <p14:sldId id="257"/>
           </p14:sldIdLst>
         </p14:section>
-        <p14:section name="Altre codifiche per gli interi con segno" id="{4fa86a60-d310-bbd1-3dbf-b11f03bb08e3}">
+        <p14:section name="Altre codifiche per gli interi con segno" id="{66e351c1-81ec-a94b-7e1c-b2a2fa9dd770}">
           <p14:sldIdLst>
             <p14:sldId id="258"/>
             <p14:sldId id="259"/>
@@ -140,13 +140,13 @@
             <p14:sldId id="261"/>
           </p14:sldIdLst>
         </p14:section>
-        <p14:section name="Virgola fissa" id="{a773d5fa-83ae-2f46-622c-9cdc2577ec39}">
+        <p14:section name="Virgola fissa" id="{9564011e-4a1e-55cd-46bd-817ebda04bca}">
           <p14:sldIdLst>
             <p14:sldId id="262"/>
             <p14:sldId id="263"/>
           </p14:sldIdLst>
         </p14:section>
-        <p14:section name="Virgola mobile" id="{644ae4cc-d05d-4a6e-c096-025289a469c4}">
+        <p14:section name="Virgola mobile" id="{f9572c93-664b-b098-32ac-9bba342c130e}">
           <p14:sldIdLst>
             <p14:sldId id="264"/>
             <p14:sldId id="265"/>
@@ -156,7 +156,7 @@
             <p14:sldId id="269"/>
           </p14:sldIdLst>
         </p14:section>
-        <p14:section name="Ritorno alla macchina" id="{e85c641e-7af4-87e2-7061-3a5f34179aed}">
+        <p14:section name="Ritorno alla macchina" id="{fcf7d42c-f8f5-bd46-9fc8-cab99c89a132}">
           <p14:sldIdLst>
             <p14:sldId id="270"/>
             <p14:sldId id="271"/>
@@ -573,6 +573,7 @@
               <a:t>La lezione precedente ha trattato gli interi; questa tratta i numeri con una parte frazionaria. Comincia da un problema ingegneristico concreto: una pallina deve muoversi di meno di un pixel per frame, su un processore privo di istruzioni per i numeri reali. La prima soluzione, la virgola fissa, non usa nulla al di là dell'aritmetica intera già compresa. La virgola mobile emerge poi come soluzione generale, insieme allo standard a cui si conforma sostanzialmente ogni calcolatore, IEEE 754. La lezione è quindi organizzata come una progressione da un vincolo specifico a una teoria generale, e di nuovo al vincolo.
 Stato di apprendimento: DA COMPRENDERE OGGI, alla fine di questa lezione lo spiegate, lo seguite passo passo e lo applicate da soli; DA UTILIZZARE OGGI, oggi seguite e usate la ricetta; come funziona dentro si spiega più avanti, o non fa parte del corso; DA COMPRENDERE PIÙ AVANTI, riconoscete il nome e lo scopo; lo spiega una lezione successiva. Una slide senza etichetta è contesto: una storia, un esempio, una domanda, un esercizio.
 Stato di apprendimento di questa lezione. DA COMPRENDERE OGGI: la virgola fissa; complemento a uno ed eccesso k; la virgola mobile IEEE 754; il nome RV32IMAC. DA UTILIZZARE OGGI: il programma completo, gli strumenti di PRG32 (si usa, non si studia, in questo corso). DA COMPRENDERE PIÙ AVANTI: niente. Una slide senza etichetta è contesto: una storia, un esempio, una domanda, un esercizio.
+Percorso. I risultati di oggi: (1) rappresentare un numero reale in virgola fissa e calcolarci con le istruzioni intere; (2) decodificare un numero IEEE 754 in precisione singola; (3) leggere il nome RV32IMAC e dire che cosa il kit sa e non sa calcolare in hardware. Si appoggia su: solo ciò che ha preparato la Lezione 01. Prossimo passo: Lezione 07, Verm1, parte 1: una testa che attraversa il mondo.
 Per il docente: Spirale: la lezione si apre con una palla che deve muoversi di meno di un pixel per frame su un processore senza unità in virgola mobile. La virgola fissa risolve il problema; la virgola mobile viene poi presentata come risposta generale, con IEEE 754.</a:t>
             </a:r>
             <a:endParaRPr lang="en-US" dirty="0"/>
@@ -1650,7 +1651,7 @@
             <a:r>
               <a:rPr lang="en-US" dirty="0"/>
               <a:t>Cinque conclusioni. Gli interi ammettono più rappresentazioni, scelte secondo l'uso. La virgola fissa memorizza una frazione come intero scalato, con errore assoluto costante e la velocità dell'aritmetica intera. La virgola mobile memorizza mantissa ed esponente, con un intervallo enorme ed errore relativo approssimativamente costante. IEEE 754 è lo standard universale, con configurazioni speciali per lo zero, l'infinito e NaN. Su un processore privo dell'estensione F, la virgola fissa è la scelta naturale. La prossima lezione è la prima parte di Verm1, in cui il contenuto delle ultime quattro lezioni viene messo al lavoro.
-Stato di apprendimento, riepilogo. DA COMPRENDERE OGGI: la virgola fissa; complemento a uno ed eccesso k; la virgola mobile IEEE 754; il nome RV32IMAC. DA UTILIZZARE OGGI: il programma completo, gli strumenti di PRG32 (si usa, non si studia, in questo corso). DA COMPRENDERE PIÙ AVANTI: niente. Una slide senza etichetta è contesto: una storia, un esempio, una domanda, un esercizio.
+Stato di apprendimento, riepilogo. DA COMPRENDERE OGGI: la virgola fissa; complemento a uno ed eccesso k; la virgola mobile IEEE 754; il nome RV32IMAC. DA UTILIZZARE OGGI: il programma completo, gli strumenti di PRG32 (si usa, non si studia, in questo corso). DA COMPRENDERE PIÙ AVANTI: niente. Una slide senza etichetta è contesto: una storia, un esempio, una domanda, un esercizio. Il filo della lezione: Senza l'estensione F, le frazioni sono interi con una scala concordata: Verm1 muoverà la testa di frazioni di cella proprio così. Prossimo passo: la prima parte del progetto. Biglietto d'uscita (da due a quattro minuti, da soli, su carta): 1. Leggete RV32IMAC lettera per lettera. Uno studente scrive fmul.s in una cartuccia per il kit: che cosa succede, e perché Verm1 si muove con numeri in virgola fissa? 2. In Q24.8, quale numero reale rappresenta la parola 0x00000180? Come si sommano due numeri Q24.8, e come si moltiplicano?
 Per il docente: A seguire: Verm1, parte 1, dove le prime quattro lezioni vanno a lavorare in un programma vero. Poi l'algebra di Boole.</a:t>
             </a:r>
             <a:endParaRPr lang="en-US" dirty="0"/>
